--- a/20261009_展示会LINE運用方針.pptx
+++ b/20261009_展示会LINE運用方針.pptx
@@ -2791,14 +2791,58 @@
       </p:cxnSp>
       <p:sp>
         <p:nvSpPr>
-          <p:cNvPr id="6" name="TextBox 5"/>
+          <p:cNvPr id="6" name="Rectangle 5"/>
+          <p:cNvSpPr/>
+          <p:nvPr/>
+        </p:nvSpPr>
+        <p:spPr>
+          <a:xfrm>
+            <a:off x="644400" y="1670400"/>
+            <a:ext cx="54000" cy="180000"/>
+          </a:xfrm>
+          <a:prstGeom prst="rect">
+            <a:avLst/>
+          </a:prstGeom>
+          <a:solidFill>
+            <a:srgbClr val="1F285A"/>
+          </a:solidFill>
+          <a:ln>
+            <a:noFill/>
+          </a:ln>
+          <a:effectLst/>
+        </p:spPr>
+        <p:style>
+          <a:lnRef idx="1">
+            <a:schemeClr val="accent1"/>
+          </a:lnRef>
+          <a:fillRef idx="3">
+            <a:schemeClr val="accent1"/>
+          </a:fillRef>
+          <a:effectRef idx="0">
+            <a:schemeClr val="accent1"/>
+          </a:effectRef>
+          <a:fontRef idx="minor">
+            <a:schemeClr val="lt1"/>
+          </a:fontRef>
+        </p:style>
+        <p:txBody>
+          <a:bodyPr rtlCol="0" anchor="ctr" wrap="square" lIns="72000" tIns="18000" rIns="72000" bIns="18000"/>
+          <a:lstStyle/>
+          <a:p>
+            <a:pPr algn="ctr"/>
+          </a:p>
+        </p:txBody>
+      </p:sp>
+      <p:sp>
+        <p:nvSpPr>
+          <p:cNvPr id="7" name="TextBox 6"/>
           <p:cNvSpPr txBox="1"/>
           <p:nvPr/>
         </p:nvSpPr>
         <p:spPr>
           <a:xfrm>
-            <a:off x="644400" y="1728000"/>
-            <a:ext cx="1944000" cy="342000"/>
+            <a:off x="770400" y="1620000"/>
+            <a:ext cx="8503200" cy="288000"/>
           </a:xfrm>
           <a:prstGeom prst="rect">
             <a:avLst/>
@@ -2820,7 +2864,7 @@
               </a:spcAft>
             </a:pPr>
             <a:r>
-              <a:rPr sz="1600" b="1">
+              <a:rPr sz="1350" b="1">
                 <a:solidFill>
                   <a:srgbClr val="1F285A"/>
                 </a:solidFill>
@@ -2828,21 +2872,21 @@
                 <a:ea typeface="メイリオ"/>
                 <a:cs typeface="メイリオ"/>
               </a:rPr>
-              <a:t>フリークエンシー</a:t>
-            </a:r>
-          </a:p>
-        </p:txBody>
-      </p:sp>
-      <p:sp>
-        <p:nvSpPr>
-          <p:cNvPr id="7" name="TextBox 6"/>
+              <a:t>現状の数値</a:t>
+            </a:r>
+          </a:p>
+        </p:txBody>
+      </p:sp>
+      <p:sp>
+        <p:nvSpPr>
+          <p:cNvPr id="8" name="TextBox 7"/>
           <p:cNvSpPr txBox="1"/>
           <p:nvPr/>
         </p:nvSpPr>
         <p:spPr>
           <a:xfrm>
-            <a:off x="2588400" y="1728000"/>
-            <a:ext cx="6685200" cy="342000"/>
+            <a:off x="770400" y="1925999"/>
+            <a:ext cx="1655999" cy="259200"/>
           </a:xfrm>
           <a:prstGeom prst="rect">
             <a:avLst/>
@@ -2864,7 +2908,7 @@
               </a:spcAft>
             </a:pPr>
             <a:r>
-              <a:rPr sz="1600" b="0">
+              <a:rPr sz="1300" b="1">
                 <a:solidFill>
                   <a:srgbClr val="333333"/>
                 </a:solidFill>
@@ -2872,21 +2916,21 @@
                 <a:ea typeface="メイリオ"/>
                 <a:cs typeface="メイリオ"/>
               </a:rPr>
-              <a:t>5.24</a:t>
-            </a:r>
-          </a:p>
-        </p:txBody>
-      </p:sp>
-      <p:sp>
-        <p:nvSpPr>
-          <p:cNvPr id="8" name="TextBox 7"/>
+              <a:t>フリークエンシー</a:t>
+            </a:r>
+          </a:p>
+        </p:txBody>
+      </p:sp>
+      <p:sp>
+        <p:nvSpPr>
+          <p:cNvPr id="9" name="TextBox 8"/>
           <p:cNvSpPr txBox="1"/>
           <p:nvPr/>
         </p:nvSpPr>
         <p:spPr>
           <a:xfrm>
-            <a:off x="644400" y="2070000"/>
-            <a:ext cx="1944000" cy="342000"/>
+            <a:off x="2426400" y="1925999"/>
+            <a:ext cx="6847199" cy="259200"/>
           </a:xfrm>
           <a:prstGeom prst="rect">
             <a:avLst/>
@@ -2908,29 +2952,29 @@
               </a:spcAft>
             </a:pPr>
             <a:r>
-              <a:rPr sz="1600" b="1">
-                <a:solidFill>
-                  <a:srgbClr val="1F285A"/>
-                </a:solidFill>
-                <a:latin typeface="メイリオ"/>
-                <a:ea typeface="メイリオ"/>
-                <a:cs typeface="メイリオ"/>
-              </a:rPr>
-              <a:t>CPA</a:t>
-            </a:r>
-          </a:p>
-        </p:txBody>
-      </p:sp>
-      <p:sp>
-        <p:nvSpPr>
-          <p:cNvPr id="9" name="TextBox 8"/>
+              <a:rPr sz="1300" b="0">
+                <a:solidFill>
+                  <a:srgbClr val="333333"/>
+                </a:solidFill>
+                <a:latin typeface="メイリオ"/>
+                <a:ea typeface="メイリオ"/>
+                <a:cs typeface="メイリオ"/>
+              </a:rPr>
+              <a:t>5.24（同じ方が月に5回以上、同じ広告を見ている）</a:t>
+            </a:r>
+          </a:p>
+        </p:txBody>
+      </p:sp>
+      <p:sp>
+        <p:nvSpPr>
+          <p:cNvPr id="10" name="TextBox 9"/>
           <p:cNvSpPr txBox="1"/>
           <p:nvPr/>
         </p:nvSpPr>
         <p:spPr>
           <a:xfrm>
-            <a:off x="2588400" y="2070000"/>
-            <a:ext cx="6685200" cy="342000"/>
+            <a:off x="770400" y="2185200"/>
+            <a:ext cx="1655999" cy="259200"/>
           </a:xfrm>
           <a:prstGeom prst="rect">
             <a:avLst/>
@@ -2952,7 +2996,7 @@
               </a:spcAft>
             </a:pPr>
             <a:r>
-              <a:rPr sz="1600" b="0">
+              <a:rPr sz="1300" b="1">
                 <a:solidFill>
                   <a:srgbClr val="333333"/>
                 </a:solidFill>
@@ -2960,21 +3004,21 @@
                 <a:ea typeface="メイリオ"/>
                 <a:cs typeface="メイリオ"/>
               </a:rPr>
-              <a:t>15,000円以上</a:t>
-            </a:r>
-          </a:p>
-        </p:txBody>
-      </p:sp>
-      <p:sp>
-        <p:nvSpPr>
-          <p:cNvPr id="10" name="TextBox 9"/>
+              <a:t>CPA</a:t>
+            </a:r>
+          </a:p>
+        </p:txBody>
+      </p:sp>
+      <p:sp>
+        <p:nvSpPr>
+          <p:cNvPr id="11" name="TextBox 10"/>
           <p:cNvSpPr txBox="1"/>
           <p:nvPr/>
         </p:nvSpPr>
         <p:spPr>
           <a:xfrm>
-            <a:off x="644400" y="2627999"/>
-            <a:ext cx="8629200" cy="360000"/>
+            <a:off x="2426400" y="2185200"/>
+            <a:ext cx="6847199" cy="259200"/>
           </a:xfrm>
           <a:prstGeom prst="rect">
             <a:avLst/>
@@ -2996,7 +3040,7 @@
               </a:spcAft>
             </a:pPr>
             <a:r>
-              <a:rPr sz="1600" b="0">
+              <a:rPr sz="1300" b="0">
                 <a:solidFill>
                   <a:srgbClr val="333333"/>
                 </a:solidFill>
@@ -3004,21 +3048,65 @@
                 <a:ea typeface="メイリオ"/>
                 <a:cs typeface="メイリオ"/>
               </a:rPr>
-              <a:t>オーディエンスの少ないエリアに予算が多い</a:t>
-            </a:r>
-          </a:p>
-        </p:txBody>
-      </p:sp>
-      <p:sp>
-        <p:nvSpPr>
-          <p:cNvPr id="11" name="TextBox 10"/>
+              <a:t>15,000円以上（予約1件あたりの広告費）</a:t>
+            </a:r>
+          </a:p>
+        </p:txBody>
+      </p:sp>
+      <p:sp>
+        <p:nvSpPr>
+          <p:cNvPr id="12" name="Rectangle 11"/>
+          <p:cNvSpPr/>
+          <p:nvPr/>
+        </p:nvSpPr>
+        <p:spPr>
+          <a:xfrm>
+            <a:off x="644400" y="2674799"/>
+            <a:ext cx="54000" cy="180000"/>
+          </a:xfrm>
+          <a:prstGeom prst="rect">
+            <a:avLst/>
+          </a:prstGeom>
+          <a:solidFill>
+            <a:srgbClr val="1F285A"/>
+          </a:solidFill>
+          <a:ln>
+            <a:noFill/>
+          </a:ln>
+          <a:effectLst/>
+        </p:spPr>
+        <p:style>
+          <a:lnRef idx="1">
+            <a:schemeClr val="accent1"/>
+          </a:lnRef>
+          <a:fillRef idx="3">
+            <a:schemeClr val="accent1"/>
+          </a:fillRef>
+          <a:effectRef idx="0">
+            <a:schemeClr val="accent1"/>
+          </a:effectRef>
+          <a:fontRef idx="minor">
+            <a:schemeClr val="lt1"/>
+          </a:fontRef>
+        </p:style>
+        <p:txBody>
+          <a:bodyPr rtlCol="0" anchor="ctr" wrap="square" lIns="72000" tIns="18000" rIns="72000" bIns="18000"/>
+          <a:lstStyle/>
+          <a:p>
+            <a:pPr algn="ctr"/>
+          </a:p>
+        </p:txBody>
+      </p:sp>
+      <p:sp>
+        <p:nvSpPr>
+          <p:cNvPr id="13" name="TextBox 12"/>
           <p:cNvSpPr txBox="1"/>
           <p:nvPr/>
         </p:nvSpPr>
         <p:spPr>
           <a:xfrm>
-            <a:off x="644400" y="3060000"/>
-            <a:ext cx="1944000" cy="342000"/>
+            <a:off x="770400" y="2624399"/>
+            <a:ext cx="8503200" cy="288000"/>
           </a:xfrm>
           <a:prstGeom prst="rect">
             <a:avLst/>
@@ -3040,7 +3128,7 @@
               </a:spcAft>
             </a:pPr>
             <a:r>
-              <a:rPr sz="1600" b="1">
+              <a:rPr sz="1350" b="1">
                 <a:solidFill>
                   <a:srgbClr val="1F285A"/>
                 </a:solidFill>
@@ -3048,21 +3136,371 @@
                 <a:ea typeface="メイリオ"/>
                 <a:cs typeface="メイリオ"/>
               </a:rPr>
-              <a:t>三鷹</a:t>
-            </a:r>
-          </a:p>
-        </p:txBody>
-      </p:sp>
-      <p:sp>
-        <p:nvSpPr>
-          <p:cNvPr id="12" name="TextBox 11"/>
+              <a:t>なぜ効率が落ちるのか</a:t>
+            </a:r>
+          </a:p>
+        </p:txBody>
+      </p:sp>
+      <p:sp>
+        <p:nvSpPr>
+          <p:cNvPr id="14" name="Rectangle 13"/>
+          <p:cNvSpPr/>
+          <p:nvPr/>
+        </p:nvSpPr>
+        <p:spPr>
+          <a:xfrm>
+            <a:off x="770400" y="2966399"/>
+            <a:ext cx="2654399" cy="486000"/>
+          </a:xfrm>
+          <a:prstGeom prst="rect">
+            <a:avLst/>
+          </a:prstGeom>
+          <a:solidFill>
+            <a:srgbClr val="FFFFFF"/>
+          </a:solidFill>
+          <a:ln w="12700">
+            <a:solidFill>
+              <a:srgbClr val="1F285A"/>
+            </a:solidFill>
+          </a:ln>
+          <a:effectLst/>
+        </p:spPr>
+        <p:style>
+          <a:lnRef idx="1">
+            <a:schemeClr val="accent1"/>
+          </a:lnRef>
+          <a:fillRef idx="3">
+            <a:schemeClr val="accent1"/>
+          </a:fillRef>
+          <a:effectRef idx="0">
+            <a:schemeClr val="accent1"/>
+          </a:effectRef>
+          <a:fontRef idx="minor">
+            <a:schemeClr val="lt1"/>
+          </a:fontRef>
+        </p:style>
+        <p:txBody>
+          <a:bodyPr rtlCol="0" anchor="ctr" wrap="square" lIns="36000" tIns="18000" rIns="36000" bIns="18000"/>
+          <a:lstStyle/>
+          <a:p>
+            <a:pPr algn="ctr">
+              <a:lnSpc>
+                <a:spcPct val="110000"/>
+              </a:lnSpc>
+              <a:spcAft>
+                <a:spcPts val="0"/>
+              </a:spcAft>
+            </a:pPr>
+            <a:r>
+              <a:rPr sz="1150" b="0">
+                <a:solidFill>
+                  <a:srgbClr val="333333"/>
+                </a:solidFill>
+                <a:latin typeface="メイリオ"/>
+                <a:ea typeface="メイリオ"/>
+                <a:cs typeface="メイリオ"/>
+              </a:rPr>
+              <a:t>オーディエンスが少ない</a:t>
+            </a:r>
+          </a:p>
+        </p:txBody>
+      </p:sp>
+      <p:cxnSp>
+        <p:nvCxnSpPr>
+          <p:cNvPr id="15" name="Connector 14"/>
+          <p:cNvCxnSpPr/>
+          <p:nvPr/>
+        </p:nvCxnSpPr>
+        <p:spPr>
+          <a:xfrm>
+            <a:off x="3460799" y="3209399"/>
+            <a:ext cx="198000" cy="0"/>
+          </a:xfrm>
+          <a:prstGeom prst="line">
+            <a:avLst/>
+          </a:prstGeom>
+          <a:ln w="19050">
+            <a:solidFill>
+              <a:srgbClr val="1F285A"/>
+            </a:solidFill>
+            <a:tailEnd type="triangle" w="med" len="med"/>
+          </a:ln>
+        </p:spPr>
+        <p:style>
+          <a:lnRef idx="2">
+            <a:schemeClr val="accent1"/>
+          </a:lnRef>
+          <a:fillRef idx="0">
+            <a:schemeClr val="accent1"/>
+          </a:fillRef>
+          <a:effectRef idx="0">
+            <a:schemeClr val="accent1"/>
+          </a:effectRef>
+          <a:fontRef idx="minor">
+            <a:schemeClr val="tx1"/>
+          </a:fontRef>
+        </p:style>
+      </p:cxnSp>
+      <p:sp>
+        <p:nvSpPr>
+          <p:cNvPr id="16" name="Rectangle 15"/>
+          <p:cNvSpPr/>
+          <p:nvPr/>
+        </p:nvSpPr>
+        <p:spPr>
+          <a:xfrm>
+            <a:off x="3694799" y="2966399"/>
+            <a:ext cx="2654399" cy="486000"/>
+          </a:xfrm>
+          <a:prstGeom prst="rect">
+            <a:avLst/>
+          </a:prstGeom>
+          <a:solidFill>
+            <a:srgbClr val="FFFFFF"/>
+          </a:solidFill>
+          <a:ln w="12700">
+            <a:solidFill>
+              <a:srgbClr val="1F285A"/>
+            </a:solidFill>
+          </a:ln>
+          <a:effectLst/>
+        </p:spPr>
+        <p:style>
+          <a:lnRef idx="1">
+            <a:schemeClr val="accent1"/>
+          </a:lnRef>
+          <a:fillRef idx="3">
+            <a:schemeClr val="accent1"/>
+          </a:fillRef>
+          <a:effectRef idx="0">
+            <a:schemeClr val="accent1"/>
+          </a:effectRef>
+          <a:fontRef idx="minor">
+            <a:schemeClr val="lt1"/>
+          </a:fontRef>
+        </p:style>
+        <p:txBody>
+          <a:bodyPr rtlCol="0" anchor="ctr" wrap="square" lIns="36000" tIns="18000" rIns="36000" bIns="18000"/>
+          <a:lstStyle/>
+          <a:p>
+            <a:pPr algn="ctr">
+              <a:lnSpc>
+                <a:spcPct val="110000"/>
+              </a:lnSpc>
+              <a:spcAft>
+                <a:spcPts val="0"/>
+              </a:spcAft>
+            </a:pPr>
+            <a:r>
+              <a:rPr sz="1150" b="0">
+                <a:solidFill>
+                  <a:srgbClr val="333333"/>
+                </a:solidFill>
+                <a:latin typeface="メイリオ"/>
+                <a:ea typeface="メイリオ"/>
+                <a:cs typeface="メイリオ"/>
+              </a:rPr>
+              <a:t>予算を使い切るため、</a:t>
+            </a:r>
+          </a:p>
+          <a:p>
+            <a:pPr algn="ctr">
+              <a:lnSpc>
+                <a:spcPct val="110000"/>
+              </a:lnSpc>
+              <a:spcAft>
+                <a:spcPts val="0"/>
+              </a:spcAft>
+            </a:pPr>
+            <a:r>
+              <a:rPr sz="1150" b="0">
+                <a:solidFill>
+                  <a:srgbClr val="333333"/>
+                </a:solidFill>
+                <a:latin typeface="メイリオ"/>
+                <a:ea typeface="メイリオ"/>
+                <a:cs typeface="メイリオ"/>
+              </a:rPr>
+              <a:t>同じ方に繰り返し表示</a:t>
+            </a:r>
+          </a:p>
+        </p:txBody>
+      </p:sp>
+      <p:cxnSp>
+        <p:nvCxnSpPr>
+          <p:cNvPr id="17" name="Connector 16"/>
+          <p:cNvCxnSpPr/>
+          <p:nvPr/>
+        </p:nvCxnSpPr>
+        <p:spPr>
+          <a:xfrm>
+            <a:off x="6385199" y="3209399"/>
+            <a:ext cx="198000" cy="0"/>
+          </a:xfrm>
+          <a:prstGeom prst="line">
+            <a:avLst/>
+          </a:prstGeom>
+          <a:ln w="19050">
+            <a:solidFill>
+              <a:srgbClr val="1F285A"/>
+            </a:solidFill>
+            <a:tailEnd type="triangle" w="med" len="med"/>
+          </a:ln>
+        </p:spPr>
+        <p:style>
+          <a:lnRef idx="2">
+            <a:schemeClr val="accent1"/>
+          </a:lnRef>
+          <a:fillRef idx="0">
+            <a:schemeClr val="accent1"/>
+          </a:fillRef>
+          <a:effectRef idx="0">
+            <a:schemeClr val="accent1"/>
+          </a:effectRef>
+          <a:fontRef idx="minor">
+            <a:schemeClr val="tx1"/>
+          </a:fontRef>
+        </p:style>
+      </p:cxnSp>
+      <p:sp>
+        <p:nvSpPr>
+          <p:cNvPr id="18" name="Rectangle 17"/>
+          <p:cNvSpPr/>
+          <p:nvPr/>
+        </p:nvSpPr>
+        <p:spPr>
+          <a:xfrm>
+            <a:off x="6619199" y="2966399"/>
+            <a:ext cx="2654399" cy="486000"/>
+          </a:xfrm>
+          <a:prstGeom prst="rect">
+            <a:avLst/>
+          </a:prstGeom>
+          <a:solidFill>
+            <a:srgbClr val="1F285A"/>
+          </a:solidFill>
+          <a:ln w="12700">
+            <a:solidFill>
+              <a:srgbClr val="1F285A"/>
+            </a:solidFill>
+          </a:ln>
+          <a:effectLst/>
+        </p:spPr>
+        <p:style>
+          <a:lnRef idx="1">
+            <a:schemeClr val="accent1"/>
+          </a:lnRef>
+          <a:fillRef idx="3">
+            <a:schemeClr val="accent1"/>
+          </a:fillRef>
+          <a:effectRef idx="0">
+            <a:schemeClr val="accent1"/>
+          </a:effectRef>
+          <a:fontRef idx="minor">
+            <a:schemeClr val="lt1"/>
+          </a:fontRef>
+        </p:style>
+        <p:txBody>
+          <a:bodyPr rtlCol="0" anchor="ctr" wrap="square" lIns="36000" tIns="18000" rIns="36000" bIns="18000"/>
+          <a:lstStyle/>
+          <a:p>
+            <a:pPr algn="ctr">
+              <a:lnSpc>
+                <a:spcPct val="110000"/>
+              </a:lnSpc>
+              <a:spcAft>
+                <a:spcPts val="0"/>
+              </a:spcAft>
+            </a:pPr>
+            <a:r>
+              <a:rPr sz="1150" b="1">
+                <a:solidFill>
+                  <a:srgbClr val="FFFFFF"/>
+                </a:solidFill>
+                <a:latin typeface="メイリオ"/>
+                <a:ea typeface="メイリオ"/>
+                <a:cs typeface="メイリオ"/>
+              </a:rPr>
+              <a:t>予約は増えず、</a:t>
+            </a:r>
+          </a:p>
+          <a:p>
+            <a:pPr algn="ctr">
+              <a:lnSpc>
+                <a:spcPct val="110000"/>
+              </a:lnSpc>
+              <a:spcAft>
+                <a:spcPts val="0"/>
+              </a:spcAft>
+            </a:pPr>
+            <a:r>
+              <a:rPr sz="1150" b="1">
+                <a:solidFill>
+                  <a:srgbClr val="FFFFFF"/>
+                </a:solidFill>
+                <a:latin typeface="メイリオ"/>
+                <a:ea typeface="メイリオ"/>
+                <a:cs typeface="メイリオ"/>
+              </a:rPr>
+              <a:t>CPAだけ上がる</a:t>
+            </a:r>
+          </a:p>
+        </p:txBody>
+      </p:sp>
+      <p:sp>
+        <p:nvSpPr>
+          <p:cNvPr id="19" name="Rectangle 18"/>
+          <p:cNvSpPr/>
+          <p:nvPr/>
+        </p:nvSpPr>
+        <p:spPr>
+          <a:xfrm>
+            <a:off x="644400" y="3718799"/>
+            <a:ext cx="54000" cy="180000"/>
+          </a:xfrm>
+          <a:prstGeom prst="rect">
+            <a:avLst/>
+          </a:prstGeom>
+          <a:solidFill>
+            <a:srgbClr val="1F285A"/>
+          </a:solidFill>
+          <a:ln>
+            <a:noFill/>
+          </a:ln>
+          <a:effectLst/>
+        </p:spPr>
+        <p:style>
+          <a:lnRef idx="1">
+            <a:schemeClr val="accent1"/>
+          </a:lnRef>
+          <a:fillRef idx="3">
+            <a:schemeClr val="accent1"/>
+          </a:fillRef>
+          <a:effectRef idx="0">
+            <a:schemeClr val="accent1"/>
+          </a:effectRef>
+          <a:fontRef idx="minor">
+            <a:schemeClr val="lt1"/>
+          </a:fontRef>
+        </p:style>
+        <p:txBody>
+          <a:bodyPr rtlCol="0" anchor="ctr" wrap="square" lIns="72000" tIns="18000" rIns="72000" bIns="18000"/>
+          <a:lstStyle/>
+          <a:p>
+            <a:pPr algn="ctr"/>
+          </a:p>
+        </p:txBody>
+      </p:sp>
+      <p:sp>
+        <p:nvSpPr>
+          <p:cNvPr id="20" name="TextBox 19"/>
           <p:cNvSpPr txBox="1"/>
           <p:nvPr/>
         </p:nvSpPr>
         <p:spPr>
           <a:xfrm>
-            <a:off x="2588400" y="3060000"/>
-            <a:ext cx="6685200" cy="342000"/>
+            <a:off x="770400" y="3668399"/>
+            <a:ext cx="8503200" cy="288000"/>
           </a:xfrm>
           <a:prstGeom prst="rect">
             <a:avLst/>
@@ -3084,29 +3522,29 @@
               </a:spcAft>
             </a:pPr>
             <a:r>
-              <a:rPr sz="1600" b="0">
-                <a:solidFill>
-                  <a:srgbClr val="333333"/>
-                </a:solidFill>
-                <a:latin typeface="メイリオ"/>
-                <a:ea typeface="メイリオ"/>
-                <a:cs typeface="メイリオ"/>
-              </a:rPr>
-              <a:t>10,700〜12,600</a:t>
-            </a:r>
-          </a:p>
-        </p:txBody>
-      </p:sp>
-      <p:sp>
-        <p:nvSpPr>
-          <p:cNvPr id="13" name="TextBox 12"/>
+              <a:rPr sz="1350" b="1">
+                <a:solidFill>
+                  <a:srgbClr val="1F285A"/>
+                </a:solidFill>
+                <a:latin typeface="メイリオ"/>
+                <a:ea typeface="メイリオ"/>
+                <a:cs typeface="メイリオ"/>
+              </a:rPr>
+              <a:t>オーディエンスの少ないエリア（例）</a:t>
+            </a:r>
+          </a:p>
+        </p:txBody>
+      </p:sp>
+      <p:sp>
+        <p:nvSpPr>
+          <p:cNvPr id="21" name="TextBox 20"/>
           <p:cNvSpPr txBox="1"/>
           <p:nvPr/>
         </p:nvSpPr>
         <p:spPr>
           <a:xfrm>
-            <a:off x="644400" y="3401999"/>
-            <a:ext cx="1944000" cy="342000"/>
+            <a:off x="770400" y="3974399"/>
+            <a:ext cx="1655999" cy="259200"/>
           </a:xfrm>
           <a:prstGeom prst="rect">
             <a:avLst/>
@@ -3128,29 +3566,29 @@
               </a:spcAft>
             </a:pPr>
             <a:r>
-              <a:rPr sz="1600" b="1">
-                <a:solidFill>
-                  <a:srgbClr val="1F285A"/>
-                </a:solidFill>
-                <a:latin typeface="メイリオ"/>
-                <a:ea typeface="メイリオ"/>
-                <a:cs typeface="メイリオ"/>
-              </a:rPr>
-              <a:t>高松</a:t>
-            </a:r>
-          </a:p>
-        </p:txBody>
-      </p:sp>
-      <p:sp>
-        <p:nvSpPr>
-          <p:cNvPr id="14" name="TextBox 13"/>
+              <a:rPr sz="1300" b="1">
+                <a:solidFill>
+                  <a:srgbClr val="333333"/>
+                </a:solidFill>
+                <a:latin typeface="メイリオ"/>
+                <a:ea typeface="メイリオ"/>
+                <a:cs typeface="メイリオ"/>
+              </a:rPr>
+              <a:t>三鷹</a:t>
+            </a:r>
+          </a:p>
+        </p:txBody>
+      </p:sp>
+      <p:sp>
+        <p:nvSpPr>
+          <p:cNvPr id="22" name="TextBox 21"/>
           <p:cNvSpPr txBox="1"/>
           <p:nvPr/>
         </p:nvSpPr>
         <p:spPr>
           <a:xfrm>
-            <a:off x="2588400" y="3401999"/>
-            <a:ext cx="6685200" cy="342000"/>
+            <a:off x="2426400" y="3974399"/>
+            <a:ext cx="6847199" cy="259200"/>
           </a:xfrm>
           <a:prstGeom prst="rect">
             <a:avLst/>
@@ -3172,7 +3610,7 @@
               </a:spcAft>
             </a:pPr>
             <a:r>
-              <a:rPr sz="1600" b="0">
+              <a:rPr sz="1300" b="0">
                 <a:solidFill>
                   <a:srgbClr val="333333"/>
                 </a:solidFill>
@@ -3180,21 +3618,21 @@
                 <a:ea typeface="メイリオ"/>
                 <a:cs typeface="メイリオ"/>
               </a:rPr>
-              <a:t>上限25,000</a:t>
-            </a:r>
-          </a:p>
-        </p:txBody>
-      </p:sp>
-      <p:sp>
-        <p:nvSpPr>
-          <p:cNvPr id="15" name="TextBox 14"/>
+              <a:t>10,700〜12,600</a:t>
+            </a:r>
+          </a:p>
+        </p:txBody>
+      </p:sp>
+      <p:sp>
+        <p:nvSpPr>
+          <p:cNvPr id="23" name="TextBox 22"/>
           <p:cNvSpPr txBox="1"/>
           <p:nvPr/>
         </p:nvSpPr>
         <p:spPr>
           <a:xfrm>
-            <a:off x="644400" y="3744000"/>
-            <a:ext cx="1944000" cy="342000"/>
+            <a:off x="770400" y="4233599"/>
+            <a:ext cx="1655999" cy="259200"/>
           </a:xfrm>
           <a:prstGeom prst="rect">
             <a:avLst/>
@@ -3216,29 +3654,29 @@
               </a:spcAft>
             </a:pPr>
             <a:r>
-              <a:rPr sz="1600" b="1">
-                <a:solidFill>
-                  <a:srgbClr val="1F285A"/>
-                </a:solidFill>
-                <a:latin typeface="メイリオ"/>
-                <a:ea typeface="メイリオ"/>
-                <a:cs typeface="メイリオ"/>
-              </a:rPr>
-              <a:t>日向</a:t>
-            </a:r>
-          </a:p>
-        </p:txBody>
-      </p:sp>
-      <p:sp>
-        <p:nvSpPr>
-          <p:cNvPr id="16" name="TextBox 15"/>
+              <a:rPr sz="1300" b="1">
+                <a:solidFill>
+                  <a:srgbClr val="333333"/>
+                </a:solidFill>
+                <a:latin typeface="メイリオ"/>
+                <a:ea typeface="メイリオ"/>
+                <a:cs typeface="メイリオ"/>
+              </a:rPr>
+              <a:t>高松</a:t>
+            </a:r>
+          </a:p>
+        </p:txBody>
+      </p:sp>
+      <p:sp>
+        <p:nvSpPr>
+          <p:cNvPr id="24" name="TextBox 23"/>
           <p:cNvSpPr txBox="1"/>
           <p:nvPr/>
         </p:nvSpPr>
         <p:spPr>
           <a:xfrm>
-            <a:off x="2588400" y="3744000"/>
-            <a:ext cx="6685200" cy="342000"/>
+            <a:off x="2426400" y="4233599"/>
+            <a:ext cx="6847199" cy="259200"/>
           </a:xfrm>
           <a:prstGeom prst="rect">
             <a:avLst/>
@@ -3260,7 +3698,95 @@
               </a:spcAft>
             </a:pPr>
             <a:r>
-              <a:rPr sz="1600" b="0">
+              <a:rPr sz="1300" b="0">
+                <a:solidFill>
+                  <a:srgbClr val="333333"/>
+                </a:solidFill>
+                <a:latin typeface="メイリオ"/>
+                <a:ea typeface="メイリオ"/>
+                <a:cs typeface="メイリオ"/>
+              </a:rPr>
+              <a:t>上限25,000</a:t>
+            </a:r>
+          </a:p>
+        </p:txBody>
+      </p:sp>
+      <p:sp>
+        <p:nvSpPr>
+          <p:cNvPr id="25" name="TextBox 24"/>
+          <p:cNvSpPr txBox="1"/>
+          <p:nvPr/>
+        </p:nvSpPr>
+        <p:spPr>
+          <a:xfrm>
+            <a:off x="770400" y="4492799"/>
+            <a:ext cx="1655999" cy="259200"/>
+          </a:xfrm>
+          <a:prstGeom prst="rect">
+            <a:avLst/>
+          </a:prstGeom>
+          <a:noFill/>
+        </p:spPr>
+        <p:txBody>
+          <a:bodyPr wrap="square" anchor="t" lIns="36000" rIns="36000" tIns="10800" bIns="10800">
+            <a:spAutoFit/>
+          </a:bodyPr>
+          <a:lstStyle/>
+          <a:p>
+            <a:pPr algn="l">
+              <a:lnSpc>
+                <a:spcPct val="105000"/>
+              </a:lnSpc>
+              <a:spcAft>
+                <a:spcPts val="200"/>
+              </a:spcAft>
+            </a:pPr>
+            <a:r>
+              <a:rPr sz="1300" b="1">
+                <a:solidFill>
+                  <a:srgbClr val="333333"/>
+                </a:solidFill>
+                <a:latin typeface="メイリオ"/>
+                <a:ea typeface="メイリオ"/>
+                <a:cs typeface="メイリオ"/>
+              </a:rPr>
+              <a:t>日向</a:t>
+            </a:r>
+          </a:p>
+        </p:txBody>
+      </p:sp>
+      <p:sp>
+        <p:nvSpPr>
+          <p:cNvPr id="26" name="TextBox 25"/>
+          <p:cNvSpPr txBox="1"/>
+          <p:nvPr/>
+        </p:nvSpPr>
+        <p:spPr>
+          <a:xfrm>
+            <a:off x="2426400" y="4492799"/>
+            <a:ext cx="6847199" cy="259200"/>
+          </a:xfrm>
+          <a:prstGeom prst="rect">
+            <a:avLst/>
+          </a:prstGeom>
+          <a:noFill/>
+        </p:spPr>
+        <p:txBody>
+          <a:bodyPr wrap="square" anchor="t" lIns="36000" rIns="36000" tIns="10800" bIns="10800">
+            <a:spAutoFit/>
+          </a:bodyPr>
+          <a:lstStyle/>
+          <a:p>
+            <a:pPr algn="l">
+              <a:lnSpc>
+                <a:spcPct val="105000"/>
+              </a:lnSpc>
+              <a:spcAft>
+                <a:spcPts val="200"/>
+              </a:spcAft>
+            </a:pPr>
+            <a:r>
+              <a:rPr sz="1300" b="0">
                 <a:solidFill>
                   <a:srgbClr val="333333"/>
                 </a:solidFill>
@@ -3421,14 +3947,58 @@
       </p:cxnSp>
       <p:sp>
         <p:nvSpPr>
-          <p:cNvPr id="6" name="TextBox 5"/>
+          <p:cNvPr id="6" name="Rectangle 5"/>
+          <p:cNvSpPr/>
+          <p:nvPr/>
+        </p:nvSpPr>
+        <p:spPr>
+          <a:xfrm>
+            <a:off x="644400" y="1670400"/>
+            <a:ext cx="54000" cy="180000"/>
+          </a:xfrm>
+          <a:prstGeom prst="rect">
+            <a:avLst/>
+          </a:prstGeom>
+          <a:solidFill>
+            <a:srgbClr val="1F285A"/>
+          </a:solidFill>
+          <a:ln>
+            <a:noFill/>
+          </a:ln>
+          <a:effectLst/>
+        </p:spPr>
+        <p:style>
+          <a:lnRef idx="1">
+            <a:schemeClr val="accent1"/>
+          </a:lnRef>
+          <a:fillRef idx="3">
+            <a:schemeClr val="accent1"/>
+          </a:fillRef>
+          <a:effectRef idx="0">
+            <a:schemeClr val="accent1"/>
+          </a:effectRef>
+          <a:fontRef idx="minor">
+            <a:schemeClr val="lt1"/>
+          </a:fontRef>
+        </p:style>
+        <p:txBody>
+          <a:bodyPr rtlCol="0" anchor="ctr" wrap="square" lIns="72000" tIns="18000" rIns="72000" bIns="18000"/>
+          <a:lstStyle/>
+          <a:p>
+            <a:pPr algn="ctr"/>
+          </a:p>
+        </p:txBody>
+      </p:sp>
+      <p:sp>
+        <p:nvSpPr>
+          <p:cNvPr id="7" name="TextBox 6"/>
           <p:cNvSpPr txBox="1"/>
           <p:nvPr/>
         </p:nvSpPr>
         <p:spPr>
           <a:xfrm>
-            <a:off x="644400" y="1728000"/>
-            <a:ext cx="1944000" cy="342000"/>
+            <a:off x="770400" y="1620000"/>
+            <a:ext cx="8503200" cy="288000"/>
           </a:xfrm>
           <a:prstGeom prst="rect">
             <a:avLst/>
@@ -3450,7 +4020,7 @@
               </a:spcAft>
             </a:pPr>
             <a:r>
-              <a:rPr sz="1600" b="1">
+              <a:rPr sz="1350" b="1">
                 <a:solidFill>
                   <a:srgbClr val="1F285A"/>
                 </a:solidFill>
@@ -3458,21 +4028,21 @@
                 <a:ea typeface="メイリオ"/>
                 <a:cs typeface="メイリオ"/>
               </a:rPr>
-              <a:t>例</a:t>
-            </a:r>
-          </a:p>
-        </p:txBody>
-      </p:sp>
-      <p:sp>
-        <p:nvSpPr>
-          <p:cNvPr id="7" name="TextBox 6"/>
+              <a:t>見直しの基準</a:t>
+            </a:r>
+          </a:p>
+        </p:txBody>
+      </p:sp>
+      <p:sp>
+        <p:nvSpPr>
+          <p:cNvPr id="8" name="TextBox 7"/>
           <p:cNvSpPr txBox="1"/>
           <p:nvPr/>
         </p:nvSpPr>
         <p:spPr>
           <a:xfrm>
-            <a:off x="2588400" y="1728000"/>
-            <a:ext cx="6685200" cy="342000"/>
+            <a:off x="770400" y="1925999"/>
+            <a:ext cx="1655999" cy="259200"/>
           </a:xfrm>
           <a:prstGeom prst="rect">
             <a:avLst/>
@@ -3494,7 +4064,7 @@
               </a:spcAft>
             </a:pPr>
             <a:r>
-              <a:rPr sz="1600" b="0">
+              <a:rPr sz="1300" b="1">
                 <a:solidFill>
                   <a:srgbClr val="333333"/>
                 </a:solidFill>
@@ -3502,21 +4072,21 @@
                 <a:ea typeface="メイリオ"/>
                 <a:cs typeface="メイリオ"/>
               </a:rPr>
-              <a:t>銀座店 30万円 → 20万円</a:t>
-            </a:r>
-          </a:p>
-        </p:txBody>
-      </p:sp>
-      <p:sp>
-        <p:nvSpPr>
-          <p:cNvPr id="8" name="TextBox 7"/>
+              <a:t>削る順番</a:t>
+            </a:r>
+          </a:p>
+        </p:txBody>
+      </p:sp>
+      <p:sp>
+        <p:nvSpPr>
+          <p:cNvPr id="9" name="TextBox 8"/>
           <p:cNvSpPr txBox="1"/>
           <p:nvPr/>
         </p:nvSpPr>
         <p:spPr>
           <a:xfrm>
-            <a:off x="644400" y="2070000"/>
-            <a:ext cx="1944000" cy="342000"/>
+            <a:off x="2426400" y="1925999"/>
+            <a:ext cx="6847199" cy="259200"/>
           </a:xfrm>
           <a:prstGeom prst="rect">
             <a:avLst/>
@@ -3538,29 +4108,29 @@
               </a:spcAft>
             </a:pPr>
             <a:r>
-              <a:rPr sz="1600" b="1">
-                <a:solidFill>
-                  <a:srgbClr val="1F285A"/>
-                </a:solidFill>
-                <a:latin typeface="メイリオ"/>
-                <a:ea typeface="メイリオ"/>
-                <a:cs typeface="メイリオ"/>
-              </a:rPr>
-              <a:t>使い道</a:t>
-            </a:r>
-          </a:p>
-        </p:txBody>
-      </p:sp>
-      <p:sp>
-        <p:nvSpPr>
-          <p:cNvPr id="9" name="TextBox 8"/>
+              <a:rPr sz="1300" b="0">
+                <a:solidFill>
+                  <a:srgbClr val="333333"/>
+                </a:solidFill>
+                <a:latin typeface="メイリオ"/>
+                <a:ea typeface="メイリオ"/>
+                <a:cs typeface="メイリオ"/>
+              </a:rPr>
+              <a:t>オーディエンス数に対して予算が多いエリアから削る</a:t>
+            </a:r>
+          </a:p>
+        </p:txBody>
+      </p:sp>
+      <p:sp>
+        <p:nvSpPr>
+          <p:cNvPr id="10" name="TextBox 9"/>
           <p:cNvSpPr txBox="1"/>
           <p:nvPr/>
         </p:nvSpPr>
         <p:spPr>
           <a:xfrm>
-            <a:off x="2588400" y="2070000"/>
-            <a:ext cx="6685200" cy="342000"/>
+            <a:off x="770400" y="2185200"/>
+            <a:ext cx="1655999" cy="259200"/>
           </a:xfrm>
           <a:prstGeom prst="rect">
             <a:avLst/>
@@ -3582,7 +4152,7 @@
               </a:spcAft>
             </a:pPr>
             <a:r>
-              <a:rPr sz="1600" b="0">
+              <a:rPr sz="1300" b="1">
                 <a:solidFill>
                   <a:srgbClr val="333333"/>
                 </a:solidFill>
@@ -3590,7 +4160,730 @@
                 <a:ea typeface="メイリオ"/>
                 <a:cs typeface="メイリオ"/>
               </a:rPr>
+              <a:t>例</a:t>
+            </a:r>
+          </a:p>
+        </p:txBody>
+      </p:sp>
+      <p:sp>
+        <p:nvSpPr>
+          <p:cNvPr id="11" name="TextBox 10"/>
+          <p:cNvSpPr txBox="1"/>
+          <p:nvPr/>
+        </p:nvSpPr>
+        <p:spPr>
+          <a:xfrm>
+            <a:off x="2426400" y="2185200"/>
+            <a:ext cx="6847199" cy="259200"/>
+          </a:xfrm>
+          <a:prstGeom prst="rect">
+            <a:avLst/>
+          </a:prstGeom>
+          <a:noFill/>
+        </p:spPr>
+        <p:txBody>
+          <a:bodyPr wrap="square" anchor="t" lIns="36000" rIns="36000" tIns="10800" bIns="10800">
+            <a:spAutoFit/>
+          </a:bodyPr>
+          <a:lstStyle/>
+          <a:p>
+            <a:pPr algn="l">
+              <a:lnSpc>
+                <a:spcPct val="105000"/>
+              </a:lnSpc>
+              <a:spcAft>
+                <a:spcPts val="200"/>
+              </a:spcAft>
+            </a:pPr>
+            <a:r>
+              <a:rPr sz="1300" b="0">
+                <a:solidFill>
+                  <a:srgbClr val="333333"/>
+                </a:solidFill>
+                <a:latin typeface="メイリオ"/>
+                <a:ea typeface="メイリオ"/>
+                <a:cs typeface="メイリオ"/>
+              </a:rPr>
+              <a:t>銀座店 30万円 → 20万円</a:t>
+            </a:r>
+          </a:p>
+        </p:txBody>
+      </p:sp>
+      <p:sp>
+        <p:nvSpPr>
+          <p:cNvPr id="12" name="Rectangle 11"/>
+          <p:cNvSpPr/>
+          <p:nvPr/>
+        </p:nvSpPr>
+        <p:spPr>
+          <a:xfrm>
+            <a:off x="644400" y="2674799"/>
+            <a:ext cx="54000" cy="180000"/>
+          </a:xfrm>
+          <a:prstGeom prst="rect">
+            <a:avLst/>
+          </a:prstGeom>
+          <a:solidFill>
+            <a:srgbClr val="1F285A"/>
+          </a:solidFill>
+          <a:ln>
+            <a:noFill/>
+          </a:ln>
+          <a:effectLst/>
+        </p:spPr>
+        <p:style>
+          <a:lnRef idx="1">
+            <a:schemeClr val="accent1"/>
+          </a:lnRef>
+          <a:fillRef idx="3">
+            <a:schemeClr val="accent1"/>
+          </a:fillRef>
+          <a:effectRef idx="0">
+            <a:schemeClr val="accent1"/>
+          </a:effectRef>
+          <a:fontRef idx="minor">
+            <a:schemeClr val="lt1"/>
+          </a:fontRef>
+        </p:style>
+        <p:txBody>
+          <a:bodyPr rtlCol="0" anchor="ctr" wrap="square" lIns="72000" tIns="18000" rIns="72000" bIns="18000"/>
+          <a:lstStyle/>
+          <a:p>
+            <a:pPr algn="ctr"/>
+          </a:p>
+        </p:txBody>
+      </p:sp>
+      <p:sp>
+        <p:nvSpPr>
+          <p:cNvPr id="13" name="TextBox 12"/>
+          <p:cNvSpPr txBox="1"/>
+          <p:nvPr/>
+        </p:nvSpPr>
+        <p:spPr>
+          <a:xfrm>
+            <a:off x="770400" y="2624399"/>
+            <a:ext cx="8503200" cy="288000"/>
+          </a:xfrm>
+          <a:prstGeom prst="rect">
+            <a:avLst/>
+          </a:prstGeom>
+          <a:noFill/>
+        </p:spPr>
+        <p:txBody>
+          <a:bodyPr wrap="square" anchor="t" lIns="36000" rIns="36000" tIns="10800" bIns="10800">
+            <a:spAutoFit/>
+          </a:bodyPr>
+          <a:lstStyle/>
+          <a:p>
+            <a:pPr algn="l">
+              <a:lnSpc>
+                <a:spcPct val="105000"/>
+              </a:lnSpc>
+              <a:spcAft>
+                <a:spcPts val="200"/>
+              </a:spcAft>
+            </a:pPr>
+            <a:r>
+              <a:rPr sz="1350" b="1">
+                <a:solidFill>
+                  <a:srgbClr val="1F285A"/>
+                </a:solidFill>
+                <a:latin typeface="メイリオ"/>
+                <a:ea typeface="メイリオ"/>
+                <a:cs typeface="メイリオ"/>
+              </a:rPr>
+              <a:t>予算の流れ</a:t>
+            </a:r>
+          </a:p>
+        </p:txBody>
+      </p:sp>
+      <p:sp>
+        <p:nvSpPr>
+          <p:cNvPr id="14" name="Rectangle 13"/>
+          <p:cNvSpPr/>
+          <p:nvPr/>
+        </p:nvSpPr>
+        <p:spPr>
+          <a:xfrm>
+            <a:off x="770400" y="2966399"/>
+            <a:ext cx="2654399" cy="486000"/>
+          </a:xfrm>
+          <a:prstGeom prst="rect">
+            <a:avLst/>
+          </a:prstGeom>
+          <a:solidFill>
+            <a:srgbClr val="FFFFFF"/>
+          </a:solidFill>
+          <a:ln w="12700">
+            <a:solidFill>
+              <a:srgbClr val="1F285A"/>
+            </a:solidFill>
+          </a:ln>
+          <a:effectLst/>
+        </p:spPr>
+        <p:style>
+          <a:lnRef idx="1">
+            <a:schemeClr val="accent1"/>
+          </a:lnRef>
+          <a:fillRef idx="3">
+            <a:schemeClr val="accent1"/>
+          </a:fillRef>
+          <a:effectRef idx="0">
+            <a:schemeClr val="accent1"/>
+          </a:effectRef>
+          <a:fontRef idx="minor">
+            <a:schemeClr val="lt1"/>
+          </a:fontRef>
+        </p:style>
+        <p:txBody>
+          <a:bodyPr rtlCol="0" anchor="ctr" wrap="square" lIns="36000" tIns="18000" rIns="36000" bIns="18000"/>
+          <a:lstStyle/>
+          <a:p>
+            <a:pPr algn="ctr">
+              <a:lnSpc>
+                <a:spcPct val="110000"/>
+              </a:lnSpc>
+              <a:spcAft>
+                <a:spcPts val="0"/>
+              </a:spcAft>
+            </a:pPr>
+            <a:r>
+              <a:rPr sz="1150" b="0">
+                <a:solidFill>
+                  <a:srgbClr val="333333"/>
+                </a:solidFill>
+                <a:latin typeface="メイリオ"/>
+                <a:ea typeface="メイリオ"/>
+                <a:cs typeface="メイリオ"/>
+              </a:rPr>
+              <a:t>Meta広告</a:t>
+            </a:r>
+          </a:p>
+          <a:p>
+            <a:pPr algn="ctr">
+              <a:lnSpc>
+                <a:spcPct val="110000"/>
+              </a:lnSpc>
+              <a:spcAft>
+                <a:spcPts val="0"/>
+              </a:spcAft>
+            </a:pPr>
+            <a:r>
+              <a:rPr sz="1150" b="0">
+                <a:solidFill>
+                  <a:srgbClr val="333333"/>
+                </a:solidFill>
+                <a:latin typeface="メイリオ"/>
+                <a:ea typeface="メイリオ"/>
+                <a:cs typeface="メイリオ"/>
+              </a:rPr>
+              <a:t>（各エリアの予算）</a:t>
+            </a:r>
+          </a:p>
+        </p:txBody>
+      </p:sp>
+      <p:cxnSp>
+        <p:nvCxnSpPr>
+          <p:cNvPr id="15" name="Connector 14"/>
+          <p:cNvCxnSpPr/>
+          <p:nvPr/>
+        </p:nvCxnSpPr>
+        <p:spPr>
+          <a:xfrm>
+            <a:off x="3460799" y="3209399"/>
+            <a:ext cx="198000" cy="0"/>
+          </a:xfrm>
+          <a:prstGeom prst="line">
+            <a:avLst/>
+          </a:prstGeom>
+          <a:ln w="19050">
+            <a:solidFill>
+              <a:srgbClr val="1F285A"/>
+            </a:solidFill>
+            <a:tailEnd type="triangle" w="med" len="med"/>
+          </a:ln>
+        </p:spPr>
+        <p:style>
+          <a:lnRef idx="2">
+            <a:schemeClr val="accent1"/>
+          </a:lnRef>
+          <a:fillRef idx="0">
+            <a:schemeClr val="accent1"/>
+          </a:fillRef>
+          <a:effectRef idx="0">
+            <a:schemeClr val="accent1"/>
+          </a:effectRef>
+          <a:fontRef idx="minor">
+            <a:schemeClr val="tx1"/>
+          </a:fontRef>
+        </p:style>
+      </p:cxnSp>
+      <p:sp>
+        <p:nvSpPr>
+          <p:cNvPr id="16" name="Rectangle 15"/>
+          <p:cNvSpPr/>
+          <p:nvPr/>
+        </p:nvSpPr>
+        <p:spPr>
+          <a:xfrm>
+            <a:off x="3694799" y="2966399"/>
+            <a:ext cx="2654399" cy="486000"/>
+          </a:xfrm>
+          <a:prstGeom prst="rect">
+            <a:avLst/>
+          </a:prstGeom>
+          <a:solidFill>
+            <a:srgbClr val="FFFFFF"/>
+          </a:solidFill>
+          <a:ln w="12700">
+            <a:solidFill>
+              <a:srgbClr val="1F285A"/>
+            </a:solidFill>
+          </a:ln>
+          <a:effectLst/>
+        </p:spPr>
+        <p:style>
+          <a:lnRef idx="1">
+            <a:schemeClr val="accent1"/>
+          </a:lnRef>
+          <a:fillRef idx="3">
+            <a:schemeClr val="accent1"/>
+          </a:fillRef>
+          <a:effectRef idx="0">
+            <a:schemeClr val="accent1"/>
+          </a:effectRef>
+          <a:fontRef idx="minor">
+            <a:schemeClr val="lt1"/>
+          </a:fontRef>
+        </p:style>
+        <p:txBody>
+          <a:bodyPr rtlCol="0" anchor="ctr" wrap="square" lIns="36000" tIns="18000" rIns="36000" bIns="18000"/>
+          <a:lstStyle/>
+          <a:p>
+            <a:pPr algn="ctr">
+              <a:lnSpc>
+                <a:spcPct val="110000"/>
+              </a:lnSpc>
+              <a:spcAft>
+                <a:spcPts val="0"/>
+              </a:spcAft>
+            </a:pPr>
+            <a:r>
+              <a:rPr sz="1150" b="0">
+                <a:solidFill>
+                  <a:srgbClr val="333333"/>
+                </a:solidFill>
+                <a:latin typeface="メイリオ"/>
+                <a:ea typeface="メイリオ"/>
+                <a:cs typeface="メイリオ"/>
+              </a:rPr>
+              <a:t>見直しで浮いた予算</a:t>
+            </a:r>
+          </a:p>
+          <a:p>
+            <a:pPr algn="ctr">
+              <a:lnSpc>
+                <a:spcPct val="110000"/>
+              </a:lnSpc>
+              <a:spcAft>
+                <a:spcPts val="0"/>
+              </a:spcAft>
+            </a:pPr>
+            <a:r>
+              <a:rPr sz="1150" b="0">
+                <a:solidFill>
+                  <a:srgbClr val="333333"/>
+                </a:solidFill>
+                <a:latin typeface="メイリオ"/>
+                <a:ea typeface="メイリオ"/>
+                <a:cs typeface="メイリオ"/>
+              </a:rPr>
+              <a:t>（全体で10〜30万円）</a:t>
+            </a:r>
+          </a:p>
+        </p:txBody>
+      </p:sp>
+      <p:cxnSp>
+        <p:nvCxnSpPr>
+          <p:cNvPr id="17" name="Connector 16"/>
+          <p:cNvCxnSpPr/>
+          <p:nvPr/>
+        </p:nvCxnSpPr>
+        <p:spPr>
+          <a:xfrm>
+            <a:off x="6385199" y="3209399"/>
+            <a:ext cx="198000" cy="0"/>
+          </a:xfrm>
+          <a:prstGeom prst="line">
+            <a:avLst/>
+          </a:prstGeom>
+          <a:ln w="19050">
+            <a:solidFill>
+              <a:srgbClr val="1F285A"/>
+            </a:solidFill>
+            <a:tailEnd type="triangle" w="med" len="med"/>
+          </a:ln>
+        </p:spPr>
+        <p:style>
+          <a:lnRef idx="2">
+            <a:schemeClr val="accent1"/>
+          </a:lnRef>
+          <a:fillRef idx="0">
+            <a:schemeClr val="accent1"/>
+          </a:fillRef>
+          <a:effectRef idx="0">
+            <a:schemeClr val="accent1"/>
+          </a:effectRef>
+          <a:fontRef idx="minor">
+            <a:schemeClr val="tx1"/>
+          </a:fontRef>
+        </p:style>
+      </p:cxnSp>
+      <p:sp>
+        <p:nvSpPr>
+          <p:cNvPr id="18" name="Rectangle 17"/>
+          <p:cNvSpPr/>
+          <p:nvPr/>
+        </p:nvSpPr>
+        <p:spPr>
+          <a:xfrm>
+            <a:off x="6619199" y="2966399"/>
+            <a:ext cx="2654399" cy="486000"/>
+          </a:xfrm>
+          <a:prstGeom prst="rect">
+            <a:avLst/>
+          </a:prstGeom>
+          <a:solidFill>
+            <a:srgbClr val="1F285A"/>
+          </a:solidFill>
+          <a:ln w="12700">
+            <a:solidFill>
+              <a:srgbClr val="1F285A"/>
+            </a:solidFill>
+          </a:ln>
+          <a:effectLst/>
+        </p:spPr>
+        <p:style>
+          <a:lnRef idx="1">
+            <a:schemeClr val="accent1"/>
+          </a:lnRef>
+          <a:fillRef idx="3">
+            <a:schemeClr val="accent1"/>
+          </a:fillRef>
+          <a:effectRef idx="0">
+            <a:schemeClr val="accent1"/>
+          </a:effectRef>
+          <a:fontRef idx="minor">
+            <a:schemeClr val="lt1"/>
+          </a:fontRef>
+        </p:style>
+        <p:txBody>
+          <a:bodyPr rtlCol="0" anchor="ctr" wrap="square" lIns="36000" tIns="18000" rIns="36000" bIns="18000"/>
+          <a:lstStyle/>
+          <a:p>
+            <a:pPr algn="ctr">
+              <a:lnSpc>
+                <a:spcPct val="110000"/>
+              </a:lnSpc>
+              <a:spcAft>
+                <a:spcPts val="0"/>
+              </a:spcAft>
+            </a:pPr>
+            <a:r>
+              <a:rPr sz="1150" b="1">
+                <a:solidFill>
+                  <a:srgbClr val="FFFFFF"/>
+                </a:solidFill>
+                <a:latin typeface="メイリオ"/>
+                <a:ea typeface="メイリオ"/>
+                <a:cs typeface="メイリオ"/>
+              </a:rPr>
               <a:t>LINE広告（通常）</a:t>
+            </a:r>
+          </a:p>
+          <a:p>
+            <a:pPr algn="ctr">
+              <a:lnSpc>
+                <a:spcPct val="110000"/>
+              </a:lnSpc>
+              <a:spcAft>
+                <a:spcPts val="0"/>
+              </a:spcAft>
+            </a:pPr>
+            <a:r>
+              <a:rPr sz="1150" b="1">
+                <a:solidFill>
+                  <a:srgbClr val="FFFFFF"/>
+                </a:solidFill>
+                <a:latin typeface="メイリオ"/>
+                <a:ea typeface="メイリオ"/>
+                <a:cs typeface="メイリオ"/>
+              </a:rPr>
+              <a:t>20万円</a:t>
+            </a:r>
+          </a:p>
+        </p:txBody>
+      </p:sp>
+      <p:sp>
+        <p:nvSpPr>
+          <p:cNvPr id="19" name="Rectangle 18"/>
+          <p:cNvSpPr/>
+          <p:nvPr/>
+        </p:nvSpPr>
+        <p:spPr>
+          <a:xfrm>
+            <a:off x="644400" y="3718799"/>
+            <a:ext cx="54000" cy="180000"/>
+          </a:xfrm>
+          <a:prstGeom prst="rect">
+            <a:avLst/>
+          </a:prstGeom>
+          <a:solidFill>
+            <a:srgbClr val="1F285A"/>
+          </a:solidFill>
+          <a:ln>
+            <a:noFill/>
+          </a:ln>
+          <a:effectLst/>
+        </p:spPr>
+        <p:style>
+          <a:lnRef idx="1">
+            <a:schemeClr val="accent1"/>
+          </a:lnRef>
+          <a:fillRef idx="3">
+            <a:schemeClr val="accent1"/>
+          </a:fillRef>
+          <a:effectRef idx="0">
+            <a:schemeClr val="accent1"/>
+          </a:effectRef>
+          <a:fontRef idx="minor">
+            <a:schemeClr val="lt1"/>
+          </a:fontRef>
+        </p:style>
+        <p:txBody>
+          <a:bodyPr rtlCol="0" anchor="ctr" wrap="square" lIns="72000" tIns="18000" rIns="72000" bIns="18000"/>
+          <a:lstStyle/>
+          <a:p>
+            <a:pPr algn="ctr"/>
+          </a:p>
+        </p:txBody>
+      </p:sp>
+      <p:sp>
+        <p:nvSpPr>
+          <p:cNvPr id="20" name="TextBox 19"/>
+          <p:cNvSpPr txBox="1"/>
+          <p:nvPr/>
+        </p:nvSpPr>
+        <p:spPr>
+          <a:xfrm>
+            <a:off x="770400" y="3668399"/>
+            <a:ext cx="8503200" cy="288000"/>
+          </a:xfrm>
+          <a:prstGeom prst="rect">
+            <a:avLst/>
+          </a:prstGeom>
+          <a:noFill/>
+        </p:spPr>
+        <p:txBody>
+          <a:bodyPr wrap="square" anchor="t" lIns="36000" rIns="36000" tIns="10800" bIns="10800">
+            <a:spAutoFit/>
+          </a:bodyPr>
+          <a:lstStyle/>
+          <a:p>
+            <a:pPr algn="l">
+              <a:lnSpc>
+                <a:spcPct val="105000"/>
+              </a:lnSpc>
+              <a:spcAft>
+                <a:spcPts val="200"/>
+              </a:spcAft>
+            </a:pPr>
+            <a:r>
+              <a:rPr sz="1350" b="1">
+                <a:solidFill>
+                  <a:srgbClr val="1F285A"/>
+                </a:solidFill>
+                <a:latin typeface="メイリオ"/>
+                <a:ea typeface="メイリオ"/>
+                <a:cs typeface="メイリオ"/>
+              </a:rPr>
+              <a:t>費用について</a:t>
+            </a:r>
+          </a:p>
+        </p:txBody>
+      </p:sp>
+      <p:sp>
+        <p:nvSpPr>
+          <p:cNvPr id="21" name="TextBox 20"/>
+          <p:cNvSpPr txBox="1"/>
+          <p:nvPr/>
+        </p:nvSpPr>
+        <p:spPr>
+          <a:xfrm>
+            <a:off x="770400" y="3974399"/>
+            <a:ext cx="1655999" cy="259200"/>
+          </a:xfrm>
+          <a:prstGeom prst="rect">
+            <a:avLst/>
+          </a:prstGeom>
+          <a:noFill/>
+        </p:spPr>
+        <p:txBody>
+          <a:bodyPr wrap="square" anchor="t" lIns="36000" rIns="36000" tIns="10800" bIns="10800">
+            <a:spAutoFit/>
+          </a:bodyPr>
+          <a:lstStyle/>
+          <a:p>
+            <a:pPr algn="l">
+              <a:lnSpc>
+                <a:spcPct val="105000"/>
+              </a:lnSpc>
+              <a:spcAft>
+                <a:spcPts val="200"/>
+              </a:spcAft>
+            </a:pPr>
+            <a:r>
+              <a:rPr sz="1300" b="1">
+                <a:solidFill>
+                  <a:srgbClr val="333333"/>
+                </a:solidFill>
+                <a:latin typeface="メイリオ"/>
+                <a:ea typeface="メイリオ"/>
+                <a:cs typeface="メイリオ"/>
+              </a:rPr>
+              <a:t>広告費の総額</a:t>
+            </a:r>
+          </a:p>
+        </p:txBody>
+      </p:sp>
+      <p:sp>
+        <p:nvSpPr>
+          <p:cNvPr id="22" name="TextBox 21"/>
+          <p:cNvSpPr txBox="1"/>
+          <p:nvPr/>
+        </p:nvSpPr>
+        <p:spPr>
+          <a:xfrm>
+            <a:off x="2426400" y="3974399"/>
+            <a:ext cx="6847199" cy="259200"/>
+          </a:xfrm>
+          <a:prstGeom prst="rect">
+            <a:avLst/>
+          </a:prstGeom>
+          <a:noFill/>
+        </p:spPr>
+        <p:txBody>
+          <a:bodyPr wrap="square" anchor="t" lIns="36000" rIns="36000" tIns="10800" bIns="10800">
+            <a:spAutoFit/>
+          </a:bodyPr>
+          <a:lstStyle/>
+          <a:p>
+            <a:pPr algn="l">
+              <a:lnSpc>
+                <a:spcPct val="105000"/>
+              </a:lnSpc>
+              <a:spcAft>
+                <a:spcPts val="200"/>
+              </a:spcAft>
+            </a:pPr>
+            <a:r>
+              <a:rPr sz="1300" b="0">
+                <a:solidFill>
+                  <a:srgbClr val="333333"/>
+                </a:solidFill>
+                <a:latin typeface="メイリオ"/>
+                <a:ea typeface="メイリオ"/>
+                <a:cs typeface="メイリオ"/>
+              </a:rPr>
+              <a:t>変わらない（今のMeta広告の予算の中で振り替える）</a:t>
+            </a:r>
+          </a:p>
+        </p:txBody>
+      </p:sp>
+      <p:sp>
+        <p:nvSpPr>
+          <p:cNvPr id="23" name="TextBox 22"/>
+          <p:cNvSpPr txBox="1"/>
+          <p:nvPr/>
+        </p:nvSpPr>
+        <p:spPr>
+          <a:xfrm>
+            <a:off x="770400" y="4233599"/>
+            <a:ext cx="1655999" cy="259200"/>
+          </a:xfrm>
+          <a:prstGeom prst="rect">
+            <a:avLst/>
+          </a:prstGeom>
+          <a:noFill/>
+        </p:spPr>
+        <p:txBody>
+          <a:bodyPr wrap="square" anchor="t" lIns="36000" rIns="36000" tIns="10800" bIns="10800">
+            <a:spAutoFit/>
+          </a:bodyPr>
+          <a:lstStyle/>
+          <a:p>
+            <a:pPr algn="l">
+              <a:lnSpc>
+                <a:spcPct val="105000"/>
+              </a:lnSpc>
+              <a:spcAft>
+                <a:spcPts val="200"/>
+              </a:spcAft>
+            </a:pPr>
+            <a:r>
+              <a:rPr sz="1300" b="1">
+                <a:solidFill>
+                  <a:srgbClr val="333333"/>
+                </a:solidFill>
+                <a:latin typeface="メイリオ"/>
+                <a:ea typeface="メイリオ"/>
+                <a:cs typeface="メイリオ"/>
+              </a:rPr>
+              <a:t>LINE広告</a:t>
+            </a:r>
+          </a:p>
+        </p:txBody>
+      </p:sp>
+      <p:sp>
+        <p:nvSpPr>
+          <p:cNvPr id="24" name="TextBox 23"/>
+          <p:cNvSpPr txBox="1"/>
+          <p:nvPr/>
+        </p:nvSpPr>
+        <p:spPr>
+          <a:xfrm>
+            <a:off x="2426400" y="4233599"/>
+            <a:ext cx="6847199" cy="259200"/>
+          </a:xfrm>
+          <a:prstGeom prst="rect">
+            <a:avLst/>
+          </a:prstGeom>
+          <a:noFill/>
+        </p:spPr>
+        <p:txBody>
+          <a:bodyPr wrap="square" anchor="t" lIns="36000" rIns="36000" tIns="10800" bIns="10800">
+            <a:spAutoFit/>
+          </a:bodyPr>
+          <a:lstStyle/>
+          <a:p>
+            <a:pPr algn="l">
+              <a:lnSpc>
+                <a:spcPct val="105000"/>
+              </a:lnSpc>
+              <a:spcAft>
+                <a:spcPts val="200"/>
+              </a:spcAft>
+            </a:pPr>
+            <a:r>
+              <a:rPr sz="1300" b="0">
+                <a:solidFill>
+                  <a:srgbClr val="333333"/>
+                </a:solidFill>
+                <a:latin typeface="メイリオ"/>
+                <a:ea typeface="メイリオ"/>
+                <a:cs typeface="メイリオ"/>
+              </a:rPr>
+              <a:t>20万円は全店舗の合計</a:t>
             </a:r>
           </a:p>
         </p:txBody>
@@ -3743,14 +5036,58 @@
       </p:cxnSp>
       <p:sp>
         <p:nvSpPr>
-          <p:cNvPr id="6" name="TextBox 5"/>
+          <p:cNvPr id="6" name="Rectangle 5"/>
+          <p:cNvSpPr/>
+          <p:nvPr/>
+        </p:nvSpPr>
+        <p:spPr>
+          <a:xfrm>
+            <a:off x="644400" y="1670400"/>
+            <a:ext cx="54000" cy="180000"/>
+          </a:xfrm>
+          <a:prstGeom prst="rect">
+            <a:avLst/>
+          </a:prstGeom>
+          <a:solidFill>
+            <a:srgbClr val="1F285A"/>
+          </a:solidFill>
+          <a:ln>
+            <a:noFill/>
+          </a:ln>
+          <a:effectLst/>
+        </p:spPr>
+        <p:style>
+          <a:lnRef idx="1">
+            <a:schemeClr val="accent1"/>
+          </a:lnRef>
+          <a:fillRef idx="3">
+            <a:schemeClr val="accent1"/>
+          </a:fillRef>
+          <a:effectRef idx="0">
+            <a:schemeClr val="accent1"/>
+          </a:effectRef>
+          <a:fontRef idx="minor">
+            <a:schemeClr val="lt1"/>
+          </a:fontRef>
+        </p:style>
+        <p:txBody>
+          <a:bodyPr rtlCol="0" anchor="ctr" wrap="square" lIns="72000" tIns="18000" rIns="72000" bIns="18000"/>
+          <a:lstStyle/>
+          <a:p>
+            <a:pPr algn="ctr"/>
+          </a:p>
+        </p:txBody>
+      </p:sp>
+      <p:sp>
+        <p:nvSpPr>
+          <p:cNvPr id="7" name="TextBox 6"/>
           <p:cNvSpPr txBox="1"/>
           <p:nvPr/>
         </p:nvSpPr>
         <p:spPr>
           <a:xfrm>
-            <a:off x="644400" y="1728000"/>
-            <a:ext cx="1944000" cy="342000"/>
+            <a:off x="770400" y="1620000"/>
+            <a:ext cx="8503200" cy="288000"/>
           </a:xfrm>
           <a:prstGeom prst="rect">
             <a:avLst/>
@@ -3772,7 +5109,7 @@
               </a:spcAft>
             </a:pPr>
             <a:r>
-              <a:rPr sz="1600" b="1">
+              <a:rPr sz="1350" b="1">
                 <a:solidFill>
                   <a:srgbClr val="1F285A"/>
                 </a:solidFill>
@@ -3780,21 +5117,21 @@
                 <a:ea typeface="メイリオ"/>
                 <a:cs typeface="メイリオ"/>
               </a:rPr>
-              <a:t>予約</a:t>
-            </a:r>
-          </a:p>
-        </p:txBody>
-      </p:sp>
-      <p:sp>
-        <p:nvSpPr>
-          <p:cNvPr id="7" name="TextBox 6"/>
+              <a:t>LINEの特徴</a:t>
+            </a:r>
+          </a:p>
+        </p:txBody>
+      </p:sp>
+      <p:sp>
+        <p:nvSpPr>
+          <p:cNvPr id="8" name="TextBox 7"/>
           <p:cNvSpPr txBox="1"/>
           <p:nvPr/>
         </p:nvSpPr>
         <p:spPr>
           <a:xfrm>
-            <a:off x="2588400" y="1728000"/>
-            <a:ext cx="6685200" cy="342000"/>
+            <a:off x="770400" y="1925999"/>
+            <a:ext cx="1655999" cy="259200"/>
           </a:xfrm>
           <a:prstGeom prst="rect">
             <a:avLst/>
@@ -3816,7 +5153,7 @@
               </a:spcAft>
             </a:pPr>
             <a:r>
-              <a:rPr sz="1600" b="0">
+              <a:rPr sz="1300" b="1">
                 <a:solidFill>
                   <a:srgbClr val="333333"/>
                 </a:solidFill>
@@ -3824,21 +5161,21 @@
                 <a:ea typeface="メイリオ"/>
                 <a:cs typeface="メイリオ"/>
               </a:rPr>
-              <a:t>仮に予算20万円 → クリック2,000 → 予約20件</a:t>
-            </a:r>
-          </a:p>
-        </p:txBody>
-      </p:sp>
-      <p:sp>
-        <p:nvSpPr>
-          <p:cNvPr id="8" name="TextBox 7"/>
+              <a:t>利用者数</a:t>
+            </a:r>
+          </a:p>
+        </p:txBody>
+      </p:sp>
+      <p:sp>
+        <p:nvSpPr>
+          <p:cNvPr id="9" name="TextBox 8"/>
           <p:cNvSpPr txBox="1"/>
           <p:nvPr/>
         </p:nvSpPr>
         <p:spPr>
           <a:xfrm>
-            <a:off x="644400" y="2070000"/>
-            <a:ext cx="1944000" cy="342000"/>
+            <a:off x="2426400" y="1925999"/>
+            <a:ext cx="6847199" cy="259200"/>
           </a:xfrm>
           <a:prstGeom prst="rect">
             <a:avLst/>
@@ -3860,29 +5197,29 @@
               </a:spcAft>
             </a:pPr>
             <a:r>
-              <a:rPr sz="1600" b="1">
-                <a:solidFill>
-                  <a:srgbClr val="1F285A"/>
-                </a:solidFill>
-                <a:latin typeface="メイリオ"/>
-                <a:ea typeface="メイリオ"/>
-                <a:cs typeface="メイリオ"/>
-              </a:rPr>
-              <a:t>予約1件あたり</a:t>
-            </a:r>
-          </a:p>
-        </p:txBody>
-      </p:sp>
-      <p:sp>
-        <p:nvSpPr>
-          <p:cNvPr id="9" name="TextBox 8"/>
+              <a:rPr sz="1300" b="0">
+                <a:solidFill>
+                  <a:srgbClr val="333333"/>
+                </a:solidFill>
+                <a:latin typeface="メイリオ"/>
+                <a:ea typeface="メイリオ"/>
+                <a:cs typeface="メイリオ"/>
+              </a:rPr>
+              <a:t>国内の月間利用者数 1億人以上（2025年12月時点・LINEヤフー公表）</a:t>
+            </a:r>
+          </a:p>
+        </p:txBody>
+      </p:sp>
+      <p:sp>
+        <p:nvSpPr>
+          <p:cNvPr id="10" name="TextBox 9"/>
           <p:cNvSpPr txBox="1"/>
           <p:nvPr/>
         </p:nvSpPr>
         <p:spPr>
           <a:xfrm>
-            <a:off x="2588400" y="2070000"/>
-            <a:ext cx="6685200" cy="342000"/>
+            <a:off x="770400" y="2185200"/>
+            <a:ext cx="1655999" cy="259200"/>
           </a:xfrm>
           <a:prstGeom prst="rect">
             <a:avLst/>
@@ -3904,9 +5241,677 @@
               </a:spcAft>
             </a:pPr>
             <a:r>
-              <a:rPr sz="1600" b="0">
+              <a:rPr sz="1300" b="1">
                 <a:solidFill>
                   <a:srgbClr val="333333"/>
+                </a:solidFill>
+                <a:latin typeface="メイリオ"/>
+                <a:ea typeface="メイリオ"/>
+                <a:cs typeface="メイリオ"/>
+              </a:rPr>
+              <a:t>届く方</a:t>
+            </a:r>
+          </a:p>
+        </p:txBody>
+      </p:sp>
+      <p:sp>
+        <p:nvSpPr>
+          <p:cNvPr id="11" name="TextBox 10"/>
+          <p:cNvSpPr txBox="1"/>
+          <p:nvPr/>
+        </p:nvSpPr>
+        <p:spPr>
+          <a:xfrm>
+            <a:off x="2426400" y="2185200"/>
+            <a:ext cx="6847199" cy="259200"/>
+          </a:xfrm>
+          <a:prstGeom prst="rect">
+            <a:avLst/>
+          </a:prstGeom>
+          <a:noFill/>
+        </p:spPr>
+        <p:txBody>
+          <a:bodyPr wrap="square" anchor="t" lIns="36000" rIns="36000" tIns="10800" bIns="10800">
+            <a:spAutoFit/>
+          </a:bodyPr>
+          <a:lstStyle/>
+          <a:p>
+            <a:pPr algn="l">
+              <a:lnSpc>
+                <a:spcPct val="105000"/>
+              </a:lnSpc>
+              <a:spcAft>
+                <a:spcPts val="200"/>
+              </a:spcAft>
+            </a:pPr>
+            <a:r>
+              <a:rPr sz="1300" b="0">
+                <a:solidFill>
+                  <a:srgbClr val="333333"/>
+                </a:solidFill>
+                <a:latin typeface="メイリオ"/>
+                <a:ea typeface="メイリオ"/>
+                <a:cs typeface="メイリオ"/>
+              </a:rPr>
+              <a:t>Instagram・Facebookをあまり使わない方にも届く</a:t>
+            </a:r>
+          </a:p>
+        </p:txBody>
+      </p:sp>
+      <p:sp>
+        <p:nvSpPr>
+          <p:cNvPr id="12" name="TextBox 11"/>
+          <p:cNvSpPr txBox="1"/>
+          <p:nvPr/>
+        </p:nvSpPr>
+        <p:spPr>
+          <a:xfrm>
+            <a:off x="770400" y="2444399"/>
+            <a:ext cx="1655999" cy="259200"/>
+          </a:xfrm>
+          <a:prstGeom prst="rect">
+            <a:avLst/>
+          </a:prstGeom>
+          <a:noFill/>
+        </p:spPr>
+        <p:txBody>
+          <a:bodyPr wrap="square" anchor="t" lIns="36000" rIns="36000" tIns="10800" bIns="10800">
+            <a:spAutoFit/>
+          </a:bodyPr>
+          <a:lstStyle/>
+          <a:p>
+            <a:pPr algn="l">
+              <a:lnSpc>
+                <a:spcPct val="105000"/>
+              </a:lnSpc>
+              <a:spcAft>
+                <a:spcPts val="200"/>
+              </a:spcAft>
+            </a:pPr>
+            <a:r>
+              <a:rPr sz="1300" b="1">
+                <a:solidFill>
+                  <a:srgbClr val="333333"/>
+                </a:solidFill>
+                <a:latin typeface="メイリオ"/>
+                <a:ea typeface="メイリオ"/>
+                <a:cs typeface="メイリオ"/>
+              </a:rPr>
+              <a:t>絞り込み</a:t>
+            </a:r>
+          </a:p>
+        </p:txBody>
+      </p:sp>
+      <p:sp>
+        <p:nvSpPr>
+          <p:cNvPr id="13" name="TextBox 12"/>
+          <p:cNvSpPr txBox="1"/>
+          <p:nvPr/>
+        </p:nvSpPr>
+        <p:spPr>
+          <a:xfrm>
+            <a:off x="2426400" y="2444399"/>
+            <a:ext cx="6847199" cy="259200"/>
+          </a:xfrm>
+          <a:prstGeom prst="rect">
+            <a:avLst/>
+          </a:prstGeom>
+          <a:noFill/>
+        </p:spPr>
+        <p:txBody>
+          <a:bodyPr wrap="square" anchor="t" lIns="36000" rIns="36000" tIns="10800" bIns="10800">
+            <a:spAutoFit/>
+          </a:bodyPr>
+          <a:lstStyle/>
+          <a:p>
+            <a:pPr algn="l">
+              <a:lnSpc>
+                <a:spcPct val="105000"/>
+              </a:lnSpc>
+              <a:spcAft>
+                <a:spcPts val="200"/>
+              </a:spcAft>
+            </a:pPr>
+            <a:r>
+              <a:rPr sz="1300" b="0">
+                <a:solidFill>
+                  <a:srgbClr val="333333"/>
+                </a:solidFill>
+                <a:latin typeface="メイリオ"/>
+                <a:ea typeface="メイリオ"/>
+                <a:cs typeface="メイリオ"/>
+              </a:rPr>
+              <a:t>地域・年齢・性別で配信先を絞れる</a:t>
+            </a:r>
+          </a:p>
+        </p:txBody>
+      </p:sp>
+      <p:sp>
+        <p:nvSpPr>
+          <p:cNvPr id="14" name="Rectangle 13"/>
+          <p:cNvSpPr/>
+          <p:nvPr/>
+        </p:nvSpPr>
+        <p:spPr>
+          <a:xfrm>
+            <a:off x="644400" y="2934000"/>
+            <a:ext cx="54000" cy="180000"/>
+          </a:xfrm>
+          <a:prstGeom prst="rect">
+            <a:avLst/>
+          </a:prstGeom>
+          <a:solidFill>
+            <a:srgbClr val="1F285A"/>
+          </a:solidFill>
+          <a:ln>
+            <a:noFill/>
+          </a:ln>
+          <a:effectLst/>
+        </p:spPr>
+        <p:style>
+          <a:lnRef idx="1">
+            <a:schemeClr val="accent1"/>
+          </a:lnRef>
+          <a:fillRef idx="3">
+            <a:schemeClr val="accent1"/>
+          </a:fillRef>
+          <a:effectRef idx="0">
+            <a:schemeClr val="accent1"/>
+          </a:effectRef>
+          <a:fontRef idx="minor">
+            <a:schemeClr val="lt1"/>
+          </a:fontRef>
+        </p:style>
+        <p:txBody>
+          <a:bodyPr rtlCol="0" anchor="ctr" wrap="square" lIns="72000" tIns="18000" rIns="72000" bIns="18000"/>
+          <a:lstStyle/>
+          <a:p>
+            <a:pPr algn="ctr"/>
+          </a:p>
+        </p:txBody>
+      </p:sp>
+      <p:sp>
+        <p:nvSpPr>
+          <p:cNvPr id="15" name="TextBox 14"/>
+          <p:cNvSpPr txBox="1"/>
+          <p:nvPr/>
+        </p:nvSpPr>
+        <p:spPr>
+          <a:xfrm>
+            <a:off x="770400" y="2883600"/>
+            <a:ext cx="8503200" cy="288000"/>
+          </a:xfrm>
+          <a:prstGeom prst="rect">
+            <a:avLst/>
+          </a:prstGeom>
+          <a:noFill/>
+        </p:spPr>
+        <p:txBody>
+          <a:bodyPr wrap="square" anchor="t" lIns="36000" rIns="36000" tIns="10800" bIns="10800">
+            <a:spAutoFit/>
+          </a:bodyPr>
+          <a:lstStyle/>
+          <a:p>
+            <a:pPr algn="l">
+              <a:lnSpc>
+                <a:spcPct val="105000"/>
+              </a:lnSpc>
+              <a:spcAft>
+                <a:spcPts val="200"/>
+              </a:spcAft>
+            </a:pPr>
+            <a:r>
+              <a:rPr sz="1350" b="1">
+                <a:solidFill>
+                  <a:srgbClr val="1F285A"/>
+                </a:solidFill>
+                <a:latin typeface="メイリオ"/>
+                <a:ea typeface="メイリオ"/>
+                <a:cs typeface="メイリオ"/>
+              </a:rPr>
+              <a:t>仮の数値（月）</a:t>
+            </a:r>
+          </a:p>
+        </p:txBody>
+      </p:sp>
+      <p:sp>
+        <p:nvSpPr>
+          <p:cNvPr id="16" name="Rectangle 15"/>
+          <p:cNvSpPr/>
+          <p:nvPr/>
+        </p:nvSpPr>
+        <p:spPr>
+          <a:xfrm>
+            <a:off x="770400" y="3225599"/>
+            <a:ext cx="1923299" cy="486000"/>
+          </a:xfrm>
+          <a:prstGeom prst="rect">
+            <a:avLst/>
+          </a:prstGeom>
+          <a:solidFill>
+            <a:srgbClr val="FFFFFF"/>
+          </a:solidFill>
+          <a:ln w="12700">
+            <a:solidFill>
+              <a:srgbClr val="1F285A"/>
+            </a:solidFill>
+          </a:ln>
+          <a:effectLst/>
+        </p:spPr>
+        <p:style>
+          <a:lnRef idx="1">
+            <a:schemeClr val="accent1"/>
+          </a:lnRef>
+          <a:fillRef idx="3">
+            <a:schemeClr val="accent1"/>
+          </a:fillRef>
+          <a:effectRef idx="0">
+            <a:schemeClr val="accent1"/>
+          </a:effectRef>
+          <a:fontRef idx="minor">
+            <a:schemeClr val="lt1"/>
+          </a:fontRef>
+        </p:style>
+        <p:txBody>
+          <a:bodyPr rtlCol="0" anchor="ctr" wrap="square" lIns="36000" tIns="18000" rIns="36000" bIns="18000"/>
+          <a:lstStyle/>
+          <a:p>
+            <a:pPr algn="ctr">
+              <a:lnSpc>
+                <a:spcPct val="110000"/>
+              </a:lnSpc>
+              <a:spcAft>
+                <a:spcPts val="0"/>
+              </a:spcAft>
+            </a:pPr>
+            <a:r>
+              <a:rPr sz="1150" b="0">
+                <a:solidFill>
+                  <a:srgbClr val="333333"/>
+                </a:solidFill>
+                <a:latin typeface="メイリオ"/>
+                <a:ea typeface="メイリオ"/>
+                <a:cs typeface="メイリオ"/>
+              </a:rPr>
+              <a:t>予算</a:t>
+            </a:r>
+          </a:p>
+          <a:p>
+            <a:pPr algn="ctr">
+              <a:lnSpc>
+                <a:spcPct val="110000"/>
+              </a:lnSpc>
+              <a:spcAft>
+                <a:spcPts val="0"/>
+              </a:spcAft>
+            </a:pPr>
+            <a:r>
+              <a:rPr sz="1150" b="0">
+                <a:solidFill>
+                  <a:srgbClr val="333333"/>
+                </a:solidFill>
+                <a:latin typeface="メイリオ"/>
+                <a:ea typeface="メイリオ"/>
+                <a:cs typeface="メイリオ"/>
+              </a:rPr>
+              <a:t>20万円</a:t>
+            </a:r>
+          </a:p>
+        </p:txBody>
+      </p:sp>
+      <p:cxnSp>
+        <p:nvCxnSpPr>
+          <p:cNvPr id="17" name="Connector 16"/>
+          <p:cNvCxnSpPr/>
+          <p:nvPr/>
+        </p:nvCxnSpPr>
+        <p:spPr>
+          <a:xfrm>
+            <a:off x="2729700" y="3468600"/>
+            <a:ext cx="198000" cy="0"/>
+          </a:xfrm>
+          <a:prstGeom prst="line">
+            <a:avLst/>
+          </a:prstGeom>
+          <a:ln w="19050">
+            <a:solidFill>
+              <a:srgbClr val="1F285A"/>
+            </a:solidFill>
+            <a:tailEnd type="triangle" w="med" len="med"/>
+          </a:ln>
+        </p:spPr>
+        <p:style>
+          <a:lnRef idx="2">
+            <a:schemeClr val="accent1"/>
+          </a:lnRef>
+          <a:fillRef idx="0">
+            <a:schemeClr val="accent1"/>
+          </a:fillRef>
+          <a:effectRef idx="0">
+            <a:schemeClr val="accent1"/>
+          </a:effectRef>
+          <a:fontRef idx="minor">
+            <a:schemeClr val="tx1"/>
+          </a:fontRef>
+        </p:style>
+      </p:cxnSp>
+      <p:sp>
+        <p:nvSpPr>
+          <p:cNvPr id="18" name="Rectangle 17"/>
+          <p:cNvSpPr/>
+          <p:nvPr/>
+        </p:nvSpPr>
+        <p:spPr>
+          <a:xfrm>
+            <a:off x="2963700" y="3225599"/>
+            <a:ext cx="1923299" cy="486000"/>
+          </a:xfrm>
+          <a:prstGeom prst="rect">
+            <a:avLst/>
+          </a:prstGeom>
+          <a:solidFill>
+            <a:srgbClr val="FFFFFF"/>
+          </a:solidFill>
+          <a:ln w="12700">
+            <a:solidFill>
+              <a:srgbClr val="1F285A"/>
+            </a:solidFill>
+          </a:ln>
+          <a:effectLst/>
+        </p:spPr>
+        <p:style>
+          <a:lnRef idx="1">
+            <a:schemeClr val="accent1"/>
+          </a:lnRef>
+          <a:fillRef idx="3">
+            <a:schemeClr val="accent1"/>
+          </a:fillRef>
+          <a:effectRef idx="0">
+            <a:schemeClr val="accent1"/>
+          </a:effectRef>
+          <a:fontRef idx="minor">
+            <a:schemeClr val="lt1"/>
+          </a:fontRef>
+        </p:style>
+        <p:txBody>
+          <a:bodyPr rtlCol="0" anchor="ctr" wrap="square" lIns="36000" tIns="18000" rIns="36000" bIns="18000"/>
+          <a:lstStyle/>
+          <a:p>
+            <a:pPr algn="ctr">
+              <a:lnSpc>
+                <a:spcPct val="110000"/>
+              </a:lnSpc>
+              <a:spcAft>
+                <a:spcPts val="0"/>
+              </a:spcAft>
+            </a:pPr>
+            <a:r>
+              <a:rPr sz="1150" b="0">
+                <a:solidFill>
+                  <a:srgbClr val="333333"/>
+                </a:solidFill>
+                <a:latin typeface="メイリオ"/>
+                <a:ea typeface="メイリオ"/>
+                <a:cs typeface="メイリオ"/>
+              </a:rPr>
+              <a:t>クリック 2,000</a:t>
+            </a:r>
+          </a:p>
+          <a:p>
+            <a:pPr algn="ctr">
+              <a:lnSpc>
+                <a:spcPct val="110000"/>
+              </a:lnSpc>
+              <a:spcAft>
+                <a:spcPts val="0"/>
+              </a:spcAft>
+            </a:pPr>
+            <a:r>
+              <a:rPr sz="1150" b="0">
+                <a:solidFill>
+                  <a:srgbClr val="333333"/>
+                </a:solidFill>
+                <a:latin typeface="メイリオ"/>
+                <a:ea typeface="メイリオ"/>
+                <a:cs typeface="メイリオ"/>
+              </a:rPr>
+              <a:t>（CPC 100円）</a:t>
+            </a:r>
+          </a:p>
+        </p:txBody>
+      </p:sp>
+      <p:cxnSp>
+        <p:nvCxnSpPr>
+          <p:cNvPr id="19" name="Connector 18"/>
+          <p:cNvCxnSpPr/>
+          <p:nvPr/>
+        </p:nvCxnSpPr>
+        <p:spPr>
+          <a:xfrm>
+            <a:off x="4923000" y="3468600"/>
+            <a:ext cx="198000" cy="0"/>
+          </a:xfrm>
+          <a:prstGeom prst="line">
+            <a:avLst/>
+          </a:prstGeom>
+          <a:ln w="19050">
+            <a:solidFill>
+              <a:srgbClr val="1F285A"/>
+            </a:solidFill>
+            <a:tailEnd type="triangle" w="med" len="med"/>
+          </a:ln>
+        </p:spPr>
+        <p:style>
+          <a:lnRef idx="2">
+            <a:schemeClr val="accent1"/>
+          </a:lnRef>
+          <a:fillRef idx="0">
+            <a:schemeClr val="accent1"/>
+          </a:fillRef>
+          <a:effectRef idx="0">
+            <a:schemeClr val="accent1"/>
+          </a:effectRef>
+          <a:fontRef idx="minor">
+            <a:schemeClr val="tx1"/>
+          </a:fontRef>
+        </p:style>
+      </p:cxnSp>
+      <p:sp>
+        <p:nvSpPr>
+          <p:cNvPr id="20" name="Rectangle 19"/>
+          <p:cNvSpPr/>
+          <p:nvPr/>
+        </p:nvSpPr>
+        <p:spPr>
+          <a:xfrm>
+            <a:off x="5157000" y="3225599"/>
+            <a:ext cx="1923299" cy="486000"/>
+          </a:xfrm>
+          <a:prstGeom prst="rect">
+            <a:avLst/>
+          </a:prstGeom>
+          <a:solidFill>
+            <a:srgbClr val="FFFFFF"/>
+          </a:solidFill>
+          <a:ln w="12700">
+            <a:solidFill>
+              <a:srgbClr val="1F285A"/>
+            </a:solidFill>
+          </a:ln>
+          <a:effectLst/>
+        </p:spPr>
+        <p:style>
+          <a:lnRef idx="1">
+            <a:schemeClr val="accent1"/>
+          </a:lnRef>
+          <a:fillRef idx="3">
+            <a:schemeClr val="accent1"/>
+          </a:fillRef>
+          <a:effectRef idx="0">
+            <a:schemeClr val="accent1"/>
+          </a:effectRef>
+          <a:fontRef idx="minor">
+            <a:schemeClr val="lt1"/>
+          </a:fontRef>
+        </p:style>
+        <p:txBody>
+          <a:bodyPr rtlCol="0" anchor="ctr" wrap="square" lIns="36000" tIns="18000" rIns="36000" bIns="18000"/>
+          <a:lstStyle/>
+          <a:p>
+            <a:pPr algn="ctr">
+              <a:lnSpc>
+                <a:spcPct val="110000"/>
+              </a:lnSpc>
+              <a:spcAft>
+                <a:spcPts val="0"/>
+              </a:spcAft>
+            </a:pPr>
+            <a:r>
+              <a:rPr sz="1150" b="0">
+                <a:solidFill>
+                  <a:srgbClr val="333333"/>
+                </a:solidFill>
+                <a:latin typeface="メイリオ"/>
+                <a:ea typeface="メイリオ"/>
+                <a:cs typeface="メイリオ"/>
+              </a:rPr>
+              <a:t>予約 20件</a:t>
+            </a:r>
+          </a:p>
+          <a:p>
+            <a:pPr algn="ctr">
+              <a:lnSpc>
+                <a:spcPct val="110000"/>
+              </a:lnSpc>
+              <a:spcAft>
+                <a:spcPts val="0"/>
+              </a:spcAft>
+            </a:pPr>
+            <a:r>
+              <a:rPr sz="1150" b="0">
+                <a:solidFill>
+                  <a:srgbClr val="333333"/>
+                </a:solidFill>
+                <a:latin typeface="メイリオ"/>
+                <a:ea typeface="メイリオ"/>
+                <a:cs typeface="メイリオ"/>
+              </a:rPr>
+              <a:t>（予約率 1.0%）</a:t>
+            </a:r>
+          </a:p>
+        </p:txBody>
+      </p:sp>
+      <p:cxnSp>
+        <p:nvCxnSpPr>
+          <p:cNvPr id="21" name="Connector 20"/>
+          <p:cNvCxnSpPr/>
+          <p:nvPr/>
+        </p:nvCxnSpPr>
+        <p:spPr>
+          <a:xfrm>
+            <a:off x="7116299" y="3468600"/>
+            <a:ext cx="198000" cy="0"/>
+          </a:xfrm>
+          <a:prstGeom prst="line">
+            <a:avLst/>
+          </a:prstGeom>
+          <a:ln w="19050">
+            <a:solidFill>
+              <a:srgbClr val="1F285A"/>
+            </a:solidFill>
+            <a:tailEnd type="triangle" w="med" len="med"/>
+          </a:ln>
+        </p:spPr>
+        <p:style>
+          <a:lnRef idx="2">
+            <a:schemeClr val="accent1"/>
+          </a:lnRef>
+          <a:fillRef idx="0">
+            <a:schemeClr val="accent1"/>
+          </a:fillRef>
+          <a:effectRef idx="0">
+            <a:schemeClr val="accent1"/>
+          </a:effectRef>
+          <a:fontRef idx="minor">
+            <a:schemeClr val="tx1"/>
+          </a:fontRef>
+        </p:style>
+      </p:cxnSp>
+      <p:sp>
+        <p:nvSpPr>
+          <p:cNvPr id="22" name="Rectangle 21"/>
+          <p:cNvSpPr/>
+          <p:nvPr/>
+        </p:nvSpPr>
+        <p:spPr>
+          <a:xfrm>
+            <a:off x="7350299" y="3225599"/>
+            <a:ext cx="1923299" cy="486000"/>
+          </a:xfrm>
+          <a:prstGeom prst="rect">
+            <a:avLst/>
+          </a:prstGeom>
+          <a:solidFill>
+            <a:srgbClr val="1F285A"/>
+          </a:solidFill>
+          <a:ln w="12700">
+            <a:solidFill>
+              <a:srgbClr val="1F285A"/>
+            </a:solidFill>
+          </a:ln>
+          <a:effectLst/>
+        </p:spPr>
+        <p:style>
+          <a:lnRef idx="1">
+            <a:schemeClr val="accent1"/>
+          </a:lnRef>
+          <a:fillRef idx="3">
+            <a:schemeClr val="accent1"/>
+          </a:fillRef>
+          <a:effectRef idx="0">
+            <a:schemeClr val="accent1"/>
+          </a:effectRef>
+          <a:fontRef idx="minor">
+            <a:schemeClr val="lt1"/>
+          </a:fontRef>
+        </p:style>
+        <p:txBody>
+          <a:bodyPr rtlCol="0" anchor="ctr" wrap="square" lIns="36000" tIns="18000" rIns="36000" bIns="18000"/>
+          <a:lstStyle/>
+          <a:p>
+            <a:pPr algn="ctr">
+              <a:lnSpc>
+                <a:spcPct val="110000"/>
+              </a:lnSpc>
+              <a:spcAft>
+                <a:spcPts val="0"/>
+              </a:spcAft>
+            </a:pPr>
+            <a:r>
+              <a:rPr sz="1150" b="1">
+                <a:solidFill>
+                  <a:srgbClr val="FFFFFF"/>
+                </a:solidFill>
+                <a:latin typeface="メイリオ"/>
+                <a:ea typeface="メイリオ"/>
+                <a:cs typeface="メイリオ"/>
+              </a:rPr>
+              <a:t>予約1件あたり</a:t>
+            </a:r>
+          </a:p>
+          <a:p>
+            <a:pPr algn="ctr">
+              <a:lnSpc>
+                <a:spcPct val="110000"/>
+              </a:lnSpc>
+              <a:spcAft>
+                <a:spcPts val="0"/>
+              </a:spcAft>
+            </a:pPr>
+            <a:r>
+              <a:rPr sz="1150" b="1">
+                <a:solidFill>
+                  <a:srgbClr val="FFFFFF"/>
                 </a:solidFill>
                 <a:latin typeface="メイリオ"/>
                 <a:ea typeface="メイリオ"/>
@@ -4065,14 +6070,58 @@
       </p:cxnSp>
       <p:sp>
         <p:nvSpPr>
-          <p:cNvPr id="6" name="TextBox 5"/>
+          <p:cNvPr id="6" name="Rectangle 5"/>
+          <p:cNvSpPr/>
+          <p:nvPr/>
+        </p:nvSpPr>
+        <p:spPr>
+          <a:xfrm>
+            <a:off x="644400" y="1670400"/>
+            <a:ext cx="54000" cy="180000"/>
+          </a:xfrm>
+          <a:prstGeom prst="rect">
+            <a:avLst/>
+          </a:prstGeom>
+          <a:solidFill>
+            <a:srgbClr val="1F285A"/>
+          </a:solidFill>
+          <a:ln>
+            <a:noFill/>
+          </a:ln>
+          <a:effectLst/>
+        </p:spPr>
+        <p:style>
+          <a:lnRef idx="1">
+            <a:schemeClr val="accent1"/>
+          </a:lnRef>
+          <a:fillRef idx="3">
+            <a:schemeClr val="accent1"/>
+          </a:fillRef>
+          <a:effectRef idx="0">
+            <a:schemeClr val="accent1"/>
+          </a:effectRef>
+          <a:fontRef idx="minor">
+            <a:schemeClr val="lt1"/>
+          </a:fontRef>
+        </p:style>
+        <p:txBody>
+          <a:bodyPr rtlCol="0" anchor="ctr" wrap="square" lIns="72000" tIns="18000" rIns="72000" bIns="18000"/>
+          <a:lstStyle/>
+          <a:p>
+            <a:pPr algn="ctr"/>
+          </a:p>
+        </p:txBody>
+      </p:sp>
+      <p:sp>
+        <p:nvSpPr>
+          <p:cNvPr id="7" name="TextBox 6"/>
           <p:cNvSpPr txBox="1"/>
           <p:nvPr/>
         </p:nvSpPr>
         <p:spPr>
           <a:xfrm>
-            <a:off x="644400" y="1728000"/>
-            <a:ext cx="1944000" cy="342000"/>
+            <a:off x="770400" y="1620000"/>
+            <a:ext cx="8503200" cy="288000"/>
           </a:xfrm>
           <a:prstGeom prst="rect">
             <a:avLst/>
@@ -4094,7 +6143,7 @@
               </a:spcAft>
             </a:pPr>
             <a:r>
-              <a:rPr sz="1600" b="1">
+              <a:rPr sz="1350" b="1">
                 <a:solidFill>
                   <a:srgbClr val="1F285A"/>
                 </a:solidFill>
@@ -4102,21 +6151,571 @@
                 <a:ea typeface="メイリオ"/>
                 <a:cs typeface="メイリオ"/>
               </a:rPr>
-              <a:t>来場率</a:t>
-            </a:r>
-          </a:p>
-        </p:txBody>
-      </p:sp>
-      <p:sp>
-        <p:nvSpPr>
-          <p:cNvPr id="7" name="TextBox 6"/>
+              <a:t>流れ</a:t>
+            </a:r>
+          </a:p>
+        </p:txBody>
+      </p:sp>
+      <p:sp>
+        <p:nvSpPr>
+          <p:cNvPr id="8" name="Rectangle 7"/>
+          <p:cNvSpPr/>
+          <p:nvPr/>
+        </p:nvSpPr>
+        <p:spPr>
+          <a:xfrm>
+            <a:off x="770400" y="1961999"/>
+            <a:ext cx="1527840" cy="540000"/>
+          </a:xfrm>
+          <a:prstGeom prst="rect">
+            <a:avLst/>
+          </a:prstGeom>
+          <a:solidFill>
+            <a:srgbClr val="FFFFFF"/>
+          </a:solidFill>
+          <a:ln w="12700">
+            <a:solidFill>
+              <a:srgbClr val="1F285A"/>
+            </a:solidFill>
+          </a:ln>
+          <a:effectLst/>
+        </p:spPr>
+        <p:style>
+          <a:lnRef idx="1">
+            <a:schemeClr val="accent1"/>
+          </a:lnRef>
+          <a:fillRef idx="3">
+            <a:schemeClr val="accent1"/>
+          </a:fillRef>
+          <a:effectRef idx="0">
+            <a:schemeClr val="accent1"/>
+          </a:effectRef>
+          <a:fontRef idx="minor">
+            <a:schemeClr val="lt1"/>
+          </a:fontRef>
+        </p:style>
+        <p:txBody>
+          <a:bodyPr rtlCol="0" anchor="ctr" wrap="square" lIns="36000" tIns="18000" rIns="36000" bIns="18000"/>
+          <a:lstStyle/>
+          <a:p>
+            <a:pPr algn="ctr">
+              <a:lnSpc>
+                <a:spcPct val="110000"/>
+              </a:lnSpc>
+              <a:spcAft>
+                <a:spcPts val="0"/>
+              </a:spcAft>
+            </a:pPr>
+            <a:r>
+              <a:rPr sz="1150" b="0">
+                <a:solidFill>
+                  <a:srgbClr val="333333"/>
+                </a:solidFill>
+                <a:latin typeface="メイリオ"/>
+                <a:ea typeface="メイリオ"/>
+                <a:cs typeface="メイリオ"/>
+              </a:rPr>
+              <a:t>申込フォーム</a:t>
+            </a:r>
+          </a:p>
+        </p:txBody>
+      </p:sp>
+      <p:cxnSp>
+        <p:nvCxnSpPr>
+          <p:cNvPr id="9" name="Connector 8"/>
+          <p:cNvCxnSpPr/>
+          <p:nvPr/>
+        </p:nvCxnSpPr>
+        <p:spPr>
+          <a:xfrm>
+            <a:off x="2334240" y="2231999"/>
+            <a:ext cx="144000" cy="0"/>
+          </a:xfrm>
+          <a:prstGeom prst="line">
+            <a:avLst/>
+          </a:prstGeom>
+          <a:ln w="19050">
+            <a:solidFill>
+              <a:srgbClr val="1F285A"/>
+            </a:solidFill>
+            <a:tailEnd type="triangle" w="med" len="med"/>
+          </a:ln>
+        </p:spPr>
+        <p:style>
+          <a:lnRef idx="2">
+            <a:schemeClr val="accent1"/>
+          </a:lnRef>
+          <a:fillRef idx="0">
+            <a:schemeClr val="accent1"/>
+          </a:fillRef>
+          <a:effectRef idx="0">
+            <a:schemeClr val="accent1"/>
+          </a:effectRef>
+          <a:fontRef idx="minor">
+            <a:schemeClr val="tx1"/>
+          </a:fontRef>
+        </p:style>
+      </p:cxnSp>
+      <p:sp>
+        <p:nvSpPr>
+          <p:cNvPr id="10" name="Rectangle 9"/>
+          <p:cNvSpPr/>
+          <p:nvPr/>
+        </p:nvSpPr>
+        <p:spPr>
+          <a:xfrm>
+            <a:off x="2514240" y="1961999"/>
+            <a:ext cx="1527840" cy="540000"/>
+          </a:xfrm>
+          <a:prstGeom prst="rect">
+            <a:avLst/>
+          </a:prstGeom>
+          <a:solidFill>
+            <a:srgbClr val="FFFFFF"/>
+          </a:solidFill>
+          <a:ln w="12700">
+            <a:solidFill>
+              <a:srgbClr val="1F285A"/>
+            </a:solidFill>
+          </a:ln>
+          <a:effectLst/>
+        </p:spPr>
+        <p:style>
+          <a:lnRef idx="1">
+            <a:schemeClr val="accent1"/>
+          </a:lnRef>
+          <a:fillRef idx="3">
+            <a:schemeClr val="accent1"/>
+          </a:fillRef>
+          <a:effectRef idx="0">
+            <a:schemeClr val="accent1"/>
+          </a:effectRef>
+          <a:fontRef idx="minor">
+            <a:schemeClr val="lt1"/>
+          </a:fontRef>
+        </p:style>
+        <p:txBody>
+          <a:bodyPr rtlCol="0" anchor="ctr" wrap="square" lIns="36000" tIns="18000" rIns="36000" bIns="18000"/>
+          <a:lstStyle/>
+          <a:p>
+            <a:pPr algn="ctr">
+              <a:lnSpc>
+                <a:spcPct val="110000"/>
+              </a:lnSpc>
+              <a:spcAft>
+                <a:spcPts val="0"/>
+              </a:spcAft>
+            </a:pPr>
+            <a:r>
+              <a:rPr sz="1150" b="0">
+                <a:solidFill>
+                  <a:srgbClr val="333333"/>
+                </a:solidFill>
+                <a:latin typeface="メイリオ"/>
+                <a:ea typeface="メイリオ"/>
+                <a:cs typeface="メイリオ"/>
+              </a:rPr>
+              <a:t>申込完了画面</a:t>
+            </a:r>
+          </a:p>
+        </p:txBody>
+      </p:sp>
+      <p:cxnSp>
+        <p:nvCxnSpPr>
+          <p:cNvPr id="11" name="Connector 10"/>
+          <p:cNvCxnSpPr/>
+          <p:nvPr/>
+        </p:nvCxnSpPr>
+        <p:spPr>
+          <a:xfrm>
+            <a:off x="4078080" y="2231999"/>
+            <a:ext cx="144000" cy="0"/>
+          </a:xfrm>
+          <a:prstGeom prst="line">
+            <a:avLst/>
+          </a:prstGeom>
+          <a:ln w="19050">
+            <a:solidFill>
+              <a:srgbClr val="1F285A"/>
+            </a:solidFill>
+            <a:tailEnd type="triangle" w="med" len="med"/>
+          </a:ln>
+        </p:spPr>
+        <p:style>
+          <a:lnRef idx="2">
+            <a:schemeClr val="accent1"/>
+          </a:lnRef>
+          <a:fillRef idx="0">
+            <a:schemeClr val="accent1"/>
+          </a:fillRef>
+          <a:effectRef idx="0">
+            <a:schemeClr val="accent1"/>
+          </a:effectRef>
+          <a:fontRef idx="minor">
+            <a:schemeClr val="tx1"/>
+          </a:fontRef>
+        </p:style>
+      </p:cxnSp>
+      <p:sp>
+        <p:nvSpPr>
+          <p:cNvPr id="12" name="Rectangle 11"/>
+          <p:cNvSpPr/>
+          <p:nvPr/>
+        </p:nvSpPr>
+        <p:spPr>
+          <a:xfrm>
+            <a:off x="4258080" y="1961999"/>
+            <a:ext cx="1527840" cy="540000"/>
+          </a:xfrm>
+          <a:prstGeom prst="rect">
+            <a:avLst/>
+          </a:prstGeom>
+          <a:solidFill>
+            <a:srgbClr val="FFFFFF"/>
+          </a:solidFill>
+          <a:ln w="12700">
+            <a:solidFill>
+              <a:srgbClr val="1F285A"/>
+            </a:solidFill>
+          </a:ln>
+          <a:effectLst/>
+        </p:spPr>
+        <p:style>
+          <a:lnRef idx="1">
+            <a:schemeClr val="accent1"/>
+          </a:lnRef>
+          <a:fillRef idx="3">
+            <a:schemeClr val="accent1"/>
+          </a:fillRef>
+          <a:effectRef idx="0">
+            <a:schemeClr val="accent1"/>
+          </a:effectRef>
+          <a:fontRef idx="minor">
+            <a:schemeClr val="lt1"/>
+          </a:fontRef>
+        </p:style>
+        <p:txBody>
+          <a:bodyPr rtlCol="0" anchor="ctr" wrap="square" lIns="36000" tIns="18000" rIns="36000" bIns="18000"/>
+          <a:lstStyle/>
+          <a:p>
+            <a:pPr algn="ctr">
+              <a:lnSpc>
+                <a:spcPct val="110000"/>
+              </a:lnSpc>
+              <a:spcAft>
+                <a:spcPts val="0"/>
+              </a:spcAft>
+            </a:pPr>
+            <a:r>
+              <a:rPr sz="1150" b="0">
+                <a:solidFill>
+                  <a:srgbClr val="333333"/>
+                </a:solidFill>
+                <a:latin typeface="メイリオ"/>
+                <a:ea typeface="メイリオ"/>
+                <a:cs typeface="メイリオ"/>
+              </a:rPr>
+              <a:t>LINE</a:t>
+            </a:r>
+          </a:p>
+          <a:p>
+            <a:pPr algn="ctr">
+              <a:lnSpc>
+                <a:spcPct val="110000"/>
+              </a:lnSpc>
+              <a:spcAft>
+                <a:spcPts val="0"/>
+              </a:spcAft>
+            </a:pPr>
+            <a:r>
+              <a:rPr sz="1150" b="0">
+                <a:solidFill>
+                  <a:srgbClr val="333333"/>
+                </a:solidFill>
+                <a:latin typeface="メイリオ"/>
+                <a:ea typeface="メイリオ"/>
+                <a:cs typeface="メイリオ"/>
+              </a:rPr>
+              <a:t>友だち追加</a:t>
+            </a:r>
+          </a:p>
+        </p:txBody>
+      </p:sp>
+      <p:cxnSp>
+        <p:nvCxnSpPr>
+          <p:cNvPr id="13" name="Connector 12"/>
+          <p:cNvCxnSpPr/>
+          <p:nvPr/>
+        </p:nvCxnSpPr>
+        <p:spPr>
+          <a:xfrm>
+            <a:off x="5821920" y="2231999"/>
+            <a:ext cx="144000" cy="0"/>
+          </a:xfrm>
+          <a:prstGeom prst="line">
+            <a:avLst/>
+          </a:prstGeom>
+          <a:ln w="19050">
+            <a:solidFill>
+              <a:srgbClr val="1F285A"/>
+            </a:solidFill>
+            <a:tailEnd type="triangle" w="med" len="med"/>
+          </a:ln>
+        </p:spPr>
+        <p:style>
+          <a:lnRef idx="2">
+            <a:schemeClr val="accent1"/>
+          </a:lnRef>
+          <a:fillRef idx="0">
+            <a:schemeClr val="accent1"/>
+          </a:fillRef>
+          <a:effectRef idx="0">
+            <a:schemeClr val="accent1"/>
+          </a:effectRef>
+          <a:fontRef idx="minor">
+            <a:schemeClr val="tx1"/>
+          </a:fontRef>
+        </p:style>
+      </p:cxnSp>
+      <p:sp>
+        <p:nvSpPr>
+          <p:cNvPr id="14" name="Rectangle 13"/>
+          <p:cNvSpPr/>
+          <p:nvPr/>
+        </p:nvSpPr>
+        <p:spPr>
+          <a:xfrm>
+            <a:off x="6001919" y="1961999"/>
+            <a:ext cx="1527840" cy="540000"/>
+          </a:xfrm>
+          <a:prstGeom prst="rect">
+            <a:avLst/>
+          </a:prstGeom>
+          <a:solidFill>
+            <a:srgbClr val="FFFFFF"/>
+          </a:solidFill>
+          <a:ln w="12700">
+            <a:solidFill>
+              <a:srgbClr val="1F285A"/>
+            </a:solidFill>
+          </a:ln>
+          <a:effectLst/>
+        </p:spPr>
+        <p:style>
+          <a:lnRef idx="1">
+            <a:schemeClr val="accent1"/>
+          </a:lnRef>
+          <a:fillRef idx="3">
+            <a:schemeClr val="accent1"/>
+          </a:fillRef>
+          <a:effectRef idx="0">
+            <a:schemeClr val="accent1"/>
+          </a:effectRef>
+          <a:fontRef idx="minor">
+            <a:schemeClr val="lt1"/>
+          </a:fontRef>
+        </p:style>
+        <p:txBody>
+          <a:bodyPr rtlCol="0" anchor="ctr" wrap="square" lIns="36000" tIns="18000" rIns="36000" bIns="18000"/>
+          <a:lstStyle/>
+          <a:p>
+            <a:pPr algn="ctr">
+              <a:lnSpc>
+                <a:spcPct val="110000"/>
+              </a:lnSpc>
+              <a:spcAft>
+                <a:spcPts val="0"/>
+              </a:spcAft>
+            </a:pPr>
+            <a:r>
+              <a:rPr sz="1150" b="0">
+                <a:solidFill>
+                  <a:srgbClr val="333333"/>
+                </a:solidFill>
+                <a:latin typeface="メイリオ"/>
+                <a:ea typeface="メイリオ"/>
+                <a:cs typeface="メイリオ"/>
+              </a:rPr>
+              <a:t>前日・当日の</a:t>
+            </a:r>
+          </a:p>
+          <a:p>
+            <a:pPr algn="ctr">
+              <a:lnSpc>
+                <a:spcPct val="110000"/>
+              </a:lnSpc>
+              <a:spcAft>
+                <a:spcPts val="0"/>
+              </a:spcAft>
+            </a:pPr>
+            <a:r>
+              <a:rPr sz="1150" b="0">
+                <a:solidFill>
+                  <a:srgbClr val="333333"/>
+                </a:solidFill>
+                <a:latin typeface="メイリオ"/>
+                <a:ea typeface="メイリオ"/>
+                <a:cs typeface="メイリオ"/>
+              </a:rPr>
+              <a:t>お知らせ</a:t>
+            </a:r>
+          </a:p>
+        </p:txBody>
+      </p:sp>
+      <p:cxnSp>
+        <p:nvCxnSpPr>
+          <p:cNvPr id="15" name="Connector 14"/>
+          <p:cNvCxnSpPr/>
+          <p:nvPr/>
+        </p:nvCxnSpPr>
+        <p:spPr>
+          <a:xfrm>
+            <a:off x="7565759" y="2231999"/>
+            <a:ext cx="144000" cy="0"/>
+          </a:xfrm>
+          <a:prstGeom prst="line">
+            <a:avLst/>
+          </a:prstGeom>
+          <a:ln w="19050">
+            <a:solidFill>
+              <a:srgbClr val="1F285A"/>
+            </a:solidFill>
+            <a:tailEnd type="triangle" w="med" len="med"/>
+          </a:ln>
+        </p:spPr>
+        <p:style>
+          <a:lnRef idx="2">
+            <a:schemeClr val="accent1"/>
+          </a:lnRef>
+          <a:fillRef idx="0">
+            <a:schemeClr val="accent1"/>
+          </a:fillRef>
+          <a:effectRef idx="0">
+            <a:schemeClr val="accent1"/>
+          </a:effectRef>
+          <a:fontRef idx="minor">
+            <a:schemeClr val="tx1"/>
+          </a:fontRef>
+        </p:style>
+      </p:cxnSp>
+      <p:sp>
+        <p:nvSpPr>
+          <p:cNvPr id="16" name="Rectangle 15"/>
+          <p:cNvSpPr/>
+          <p:nvPr/>
+        </p:nvSpPr>
+        <p:spPr>
+          <a:xfrm>
+            <a:off x="7745759" y="1961999"/>
+            <a:ext cx="1527840" cy="540000"/>
+          </a:xfrm>
+          <a:prstGeom prst="rect">
+            <a:avLst/>
+          </a:prstGeom>
+          <a:solidFill>
+            <a:srgbClr val="1F285A"/>
+          </a:solidFill>
+          <a:ln w="12700">
+            <a:solidFill>
+              <a:srgbClr val="1F285A"/>
+            </a:solidFill>
+          </a:ln>
+          <a:effectLst/>
+        </p:spPr>
+        <p:style>
+          <a:lnRef idx="1">
+            <a:schemeClr val="accent1"/>
+          </a:lnRef>
+          <a:fillRef idx="3">
+            <a:schemeClr val="accent1"/>
+          </a:fillRef>
+          <a:effectRef idx="0">
+            <a:schemeClr val="accent1"/>
+          </a:effectRef>
+          <a:fontRef idx="minor">
+            <a:schemeClr val="lt1"/>
+          </a:fontRef>
+        </p:style>
+        <p:txBody>
+          <a:bodyPr rtlCol="0" anchor="ctr" wrap="square" lIns="36000" tIns="18000" rIns="36000" bIns="18000"/>
+          <a:lstStyle/>
+          <a:p>
+            <a:pPr algn="ctr">
+              <a:lnSpc>
+                <a:spcPct val="110000"/>
+              </a:lnSpc>
+              <a:spcAft>
+                <a:spcPts val="0"/>
+              </a:spcAft>
+            </a:pPr>
+            <a:r>
+              <a:rPr sz="1150" b="1">
+                <a:solidFill>
+                  <a:srgbClr val="FFFFFF"/>
+                </a:solidFill>
+                <a:latin typeface="メイリオ"/>
+                <a:ea typeface="メイリオ"/>
+                <a:cs typeface="メイリオ"/>
+              </a:rPr>
+              <a:t>来場</a:t>
+            </a:r>
+          </a:p>
+        </p:txBody>
+      </p:sp>
+      <p:sp>
+        <p:nvSpPr>
+          <p:cNvPr id="17" name="Rectangle 16"/>
+          <p:cNvSpPr/>
+          <p:nvPr/>
+        </p:nvSpPr>
+        <p:spPr>
+          <a:xfrm>
+            <a:off x="644400" y="2768399"/>
+            <a:ext cx="54000" cy="180000"/>
+          </a:xfrm>
+          <a:prstGeom prst="rect">
+            <a:avLst/>
+          </a:prstGeom>
+          <a:solidFill>
+            <a:srgbClr val="1F285A"/>
+          </a:solidFill>
+          <a:ln>
+            <a:noFill/>
+          </a:ln>
+          <a:effectLst/>
+        </p:spPr>
+        <p:style>
+          <a:lnRef idx="1">
+            <a:schemeClr val="accent1"/>
+          </a:lnRef>
+          <a:fillRef idx="3">
+            <a:schemeClr val="accent1"/>
+          </a:fillRef>
+          <a:effectRef idx="0">
+            <a:schemeClr val="accent1"/>
+          </a:effectRef>
+          <a:fontRef idx="minor">
+            <a:schemeClr val="lt1"/>
+          </a:fontRef>
+        </p:style>
+        <p:txBody>
+          <a:bodyPr rtlCol="0" anchor="ctr" wrap="square" lIns="72000" tIns="18000" rIns="72000" bIns="18000"/>
+          <a:lstStyle/>
+          <a:p>
+            <a:pPr algn="ctr"/>
+          </a:p>
+        </p:txBody>
+      </p:sp>
+      <p:sp>
+        <p:nvSpPr>
+          <p:cNvPr id="18" name="TextBox 17"/>
           <p:cNvSpPr txBox="1"/>
           <p:nvPr/>
         </p:nvSpPr>
         <p:spPr>
           <a:xfrm>
-            <a:off x="2588400" y="1728000"/>
-            <a:ext cx="6685200" cy="342000"/>
+            <a:off x="770400" y="2717999"/>
+            <a:ext cx="8503200" cy="288000"/>
           </a:xfrm>
           <a:prstGeom prst="rect">
             <a:avLst/>
@@ -4138,29 +6737,29 @@
               </a:spcAft>
             </a:pPr>
             <a:r>
-              <a:rPr sz="1600" b="0">
-                <a:solidFill>
-                  <a:srgbClr val="333333"/>
-                </a:solidFill>
-                <a:latin typeface="メイリオ"/>
-                <a:ea typeface="メイリオ"/>
-                <a:cs typeface="メイリオ"/>
-              </a:rPr>
-              <a:t>仮に 50% → 70%（申込100件あたり 来場50 → 70人）</a:t>
-            </a:r>
-          </a:p>
-        </p:txBody>
-      </p:sp>
-      <p:sp>
-        <p:nvSpPr>
-          <p:cNvPr id="8" name="TextBox 7"/>
+              <a:rPr sz="1350" b="1">
+                <a:solidFill>
+                  <a:srgbClr val="1F285A"/>
+                </a:solidFill>
+                <a:latin typeface="メイリオ"/>
+                <a:ea typeface="メイリオ"/>
+                <a:cs typeface="メイリオ"/>
+              </a:rPr>
+              <a:t>仮の数値（申込100件あたり）</a:t>
+            </a:r>
+          </a:p>
+        </p:txBody>
+      </p:sp>
+      <p:sp>
+        <p:nvSpPr>
+          <p:cNvPr id="19" name="TextBox 18"/>
           <p:cNvSpPr txBox="1"/>
           <p:nvPr/>
         </p:nvSpPr>
         <p:spPr>
           <a:xfrm>
-            <a:off x="644400" y="2070000"/>
-            <a:ext cx="1944000" cy="342000"/>
+            <a:off x="770400" y="3023999"/>
+            <a:ext cx="1655999" cy="259200"/>
           </a:xfrm>
           <a:prstGeom prst="rect">
             <a:avLst/>
@@ -4182,29 +6781,29 @@
               </a:spcAft>
             </a:pPr>
             <a:r>
-              <a:rPr sz="1600" b="1">
-                <a:solidFill>
-                  <a:srgbClr val="1F285A"/>
-                </a:solidFill>
-                <a:latin typeface="メイリオ"/>
-                <a:ea typeface="メイリオ"/>
-                <a:cs typeface="メイリオ"/>
-              </a:rPr>
-              <a:t>費用</a:t>
-            </a:r>
-          </a:p>
-        </p:txBody>
-      </p:sp>
-      <p:sp>
-        <p:nvSpPr>
-          <p:cNvPr id="9" name="TextBox 8"/>
+              <a:rPr sz="1300" b="1">
+                <a:solidFill>
+                  <a:srgbClr val="333333"/>
+                </a:solidFill>
+                <a:latin typeface="メイリオ"/>
+                <a:ea typeface="メイリオ"/>
+                <a:cs typeface="メイリオ"/>
+              </a:rPr>
+              <a:t>LINE友だち</a:t>
+            </a:r>
+          </a:p>
+        </p:txBody>
+      </p:sp>
+      <p:sp>
+        <p:nvSpPr>
+          <p:cNvPr id="20" name="TextBox 19"/>
           <p:cNvSpPr txBox="1"/>
           <p:nvPr/>
         </p:nvSpPr>
         <p:spPr>
           <a:xfrm>
-            <a:off x="2588400" y="2070000"/>
-            <a:ext cx="6685200" cy="342000"/>
+            <a:off x="2426400" y="3023999"/>
+            <a:ext cx="6847199" cy="259200"/>
           </a:xfrm>
           <a:prstGeom prst="rect">
             <a:avLst/>
@@ -4226,7 +6825,447 @@
               </a:spcAft>
             </a:pPr>
             <a:r>
-              <a:rPr sz="1600" b="0">
+              <a:rPr sz="1300" b="0">
+                <a:solidFill>
+                  <a:srgbClr val="333333"/>
+                </a:solidFill>
+                <a:latin typeface="メイリオ"/>
+                <a:ea typeface="メイリオ"/>
+                <a:cs typeface="メイリオ"/>
+              </a:rPr>
+              <a:t>30人（友だち登録率 30%）</a:t>
+            </a:r>
+          </a:p>
+        </p:txBody>
+      </p:sp>
+      <p:sp>
+        <p:nvSpPr>
+          <p:cNvPr id="21" name="TextBox 20"/>
+          <p:cNvSpPr txBox="1"/>
+          <p:nvPr/>
+        </p:nvSpPr>
+        <p:spPr>
+          <a:xfrm>
+            <a:off x="770400" y="3283199"/>
+            <a:ext cx="1655999" cy="259200"/>
+          </a:xfrm>
+          <a:prstGeom prst="rect">
+            <a:avLst/>
+          </a:prstGeom>
+          <a:noFill/>
+        </p:spPr>
+        <p:txBody>
+          <a:bodyPr wrap="square" anchor="t" lIns="36000" rIns="36000" tIns="10800" bIns="10800">
+            <a:spAutoFit/>
+          </a:bodyPr>
+          <a:lstStyle/>
+          <a:p>
+            <a:pPr algn="l">
+              <a:lnSpc>
+                <a:spcPct val="105000"/>
+              </a:lnSpc>
+              <a:spcAft>
+                <a:spcPts val="200"/>
+              </a:spcAft>
+            </a:pPr>
+            <a:r>
+              <a:rPr sz="1300" b="1">
+                <a:solidFill>
+                  <a:srgbClr val="333333"/>
+                </a:solidFill>
+                <a:latin typeface="メイリオ"/>
+                <a:ea typeface="メイリオ"/>
+                <a:cs typeface="メイリオ"/>
+              </a:rPr>
+              <a:t>来場率</a:t>
+            </a:r>
+          </a:p>
+        </p:txBody>
+      </p:sp>
+      <p:sp>
+        <p:nvSpPr>
+          <p:cNvPr id="22" name="TextBox 21"/>
+          <p:cNvSpPr txBox="1"/>
+          <p:nvPr/>
+        </p:nvSpPr>
+        <p:spPr>
+          <a:xfrm>
+            <a:off x="2426400" y="3283199"/>
+            <a:ext cx="6847199" cy="259200"/>
+          </a:xfrm>
+          <a:prstGeom prst="rect">
+            <a:avLst/>
+          </a:prstGeom>
+          <a:noFill/>
+        </p:spPr>
+        <p:txBody>
+          <a:bodyPr wrap="square" anchor="t" lIns="36000" rIns="36000" tIns="10800" bIns="10800">
+            <a:spAutoFit/>
+          </a:bodyPr>
+          <a:lstStyle/>
+          <a:p>
+            <a:pPr algn="l">
+              <a:lnSpc>
+                <a:spcPct val="105000"/>
+              </a:lnSpc>
+              <a:spcAft>
+                <a:spcPts val="200"/>
+              </a:spcAft>
+            </a:pPr>
+            <a:r>
+              <a:rPr sz="1300" b="0">
+                <a:solidFill>
+                  <a:srgbClr val="333333"/>
+                </a:solidFill>
+                <a:latin typeface="メイリオ"/>
+                <a:ea typeface="メイリオ"/>
+                <a:cs typeface="メイリオ"/>
+              </a:rPr>
+              <a:t>LINEでつながった方 50% → 70%</a:t>
+            </a:r>
+          </a:p>
+        </p:txBody>
+      </p:sp>
+      <p:sp>
+        <p:nvSpPr>
+          <p:cNvPr id="23" name="TextBox 22"/>
+          <p:cNvSpPr txBox="1"/>
+          <p:nvPr/>
+        </p:nvSpPr>
+        <p:spPr>
+          <a:xfrm>
+            <a:off x="770400" y="3542399"/>
+            <a:ext cx="1655999" cy="259200"/>
+          </a:xfrm>
+          <a:prstGeom prst="rect">
+            <a:avLst/>
+          </a:prstGeom>
+          <a:noFill/>
+        </p:spPr>
+        <p:txBody>
+          <a:bodyPr wrap="square" anchor="t" lIns="36000" rIns="36000" tIns="10800" bIns="10800">
+            <a:spAutoFit/>
+          </a:bodyPr>
+          <a:lstStyle/>
+          <a:p>
+            <a:pPr algn="l">
+              <a:lnSpc>
+                <a:spcPct val="105000"/>
+              </a:lnSpc>
+              <a:spcAft>
+                <a:spcPts val="200"/>
+              </a:spcAft>
+            </a:pPr>
+            <a:r>
+              <a:rPr sz="1300" b="1">
+                <a:solidFill>
+                  <a:srgbClr val="333333"/>
+                </a:solidFill>
+                <a:latin typeface="メイリオ"/>
+                <a:ea typeface="メイリオ"/>
+                <a:cs typeface="メイリオ"/>
+              </a:rPr>
+              <a:t>来場</a:t>
+            </a:r>
+          </a:p>
+        </p:txBody>
+      </p:sp>
+      <p:sp>
+        <p:nvSpPr>
+          <p:cNvPr id="24" name="TextBox 23"/>
+          <p:cNvSpPr txBox="1"/>
+          <p:nvPr/>
+        </p:nvSpPr>
+        <p:spPr>
+          <a:xfrm>
+            <a:off x="2426400" y="3542399"/>
+            <a:ext cx="6847199" cy="259200"/>
+          </a:xfrm>
+          <a:prstGeom prst="rect">
+            <a:avLst/>
+          </a:prstGeom>
+          <a:noFill/>
+        </p:spPr>
+        <p:txBody>
+          <a:bodyPr wrap="square" anchor="t" lIns="36000" rIns="36000" tIns="10800" bIns="10800">
+            <a:spAutoFit/>
+          </a:bodyPr>
+          <a:lstStyle/>
+          <a:p>
+            <a:pPr algn="l">
+              <a:lnSpc>
+                <a:spcPct val="105000"/>
+              </a:lnSpc>
+              <a:spcAft>
+                <a:spcPts val="200"/>
+              </a:spcAft>
+            </a:pPr>
+            <a:r>
+              <a:rPr sz="1300" b="0">
+                <a:solidFill>
+                  <a:srgbClr val="333333"/>
+                </a:solidFill>
+                <a:latin typeface="メイリオ"/>
+                <a:ea typeface="メイリオ"/>
+                <a:cs typeface="メイリオ"/>
+              </a:rPr>
+              <a:t>50人 → 56人</a:t>
+            </a:r>
+          </a:p>
+        </p:txBody>
+      </p:sp>
+      <p:sp>
+        <p:nvSpPr>
+          <p:cNvPr id="25" name="Rectangle 24"/>
+          <p:cNvSpPr/>
+          <p:nvPr/>
+        </p:nvSpPr>
+        <p:spPr>
+          <a:xfrm>
+            <a:off x="644400" y="4031999"/>
+            <a:ext cx="54000" cy="180000"/>
+          </a:xfrm>
+          <a:prstGeom prst="rect">
+            <a:avLst/>
+          </a:prstGeom>
+          <a:solidFill>
+            <a:srgbClr val="1F285A"/>
+          </a:solidFill>
+          <a:ln>
+            <a:noFill/>
+          </a:ln>
+          <a:effectLst/>
+        </p:spPr>
+        <p:style>
+          <a:lnRef idx="1">
+            <a:schemeClr val="accent1"/>
+          </a:lnRef>
+          <a:fillRef idx="3">
+            <a:schemeClr val="accent1"/>
+          </a:fillRef>
+          <a:effectRef idx="0">
+            <a:schemeClr val="accent1"/>
+          </a:effectRef>
+          <a:fontRef idx="minor">
+            <a:schemeClr val="lt1"/>
+          </a:fontRef>
+        </p:style>
+        <p:txBody>
+          <a:bodyPr rtlCol="0" anchor="ctr" wrap="square" lIns="72000" tIns="18000" rIns="72000" bIns="18000"/>
+          <a:lstStyle/>
+          <a:p>
+            <a:pPr algn="ctr"/>
+          </a:p>
+        </p:txBody>
+      </p:sp>
+      <p:sp>
+        <p:nvSpPr>
+          <p:cNvPr id="26" name="TextBox 25"/>
+          <p:cNvSpPr txBox="1"/>
+          <p:nvPr/>
+        </p:nvSpPr>
+        <p:spPr>
+          <a:xfrm>
+            <a:off x="770400" y="3981599"/>
+            <a:ext cx="8503200" cy="288000"/>
+          </a:xfrm>
+          <a:prstGeom prst="rect">
+            <a:avLst/>
+          </a:prstGeom>
+          <a:noFill/>
+        </p:spPr>
+        <p:txBody>
+          <a:bodyPr wrap="square" anchor="t" lIns="36000" rIns="36000" tIns="10800" bIns="10800">
+            <a:spAutoFit/>
+          </a:bodyPr>
+          <a:lstStyle/>
+          <a:p>
+            <a:pPr algn="l">
+              <a:lnSpc>
+                <a:spcPct val="105000"/>
+              </a:lnSpc>
+              <a:spcAft>
+                <a:spcPts val="200"/>
+              </a:spcAft>
+            </a:pPr>
+            <a:r>
+              <a:rPr sz="1350" b="1">
+                <a:solidFill>
+                  <a:srgbClr val="1F285A"/>
+                </a:solidFill>
+                <a:latin typeface="メイリオ"/>
+                <a:ea typeface="メイリオ"/>
+                <a:cs typeface="メイリオ"/>
+              </a:rPr>
+              <a:t>実績・費用</a:t>
+            </a:r>
+          </a:p>
+        </p:txBody>
+      </p:sp>
+      <p:sp>
+        <p:nvSpPr>
+          <p:cNvPr id="27" name="TextBox 26"/>
+          <p:cNvSpPr txBox="1"/>
+          <p:nvPr/>
+        </p:nvSpPr>
+        <p:spPr>
+          <a:xfrm>
+            <a:off x="770400" y="4287599"/>
+            <a:ext cx="1655999" cy="259200"/>
+          </a:xfrm>
+          <a:prstGeom prst="rect">
+            <a:avLst/>
+          </a:prstGeom>
+          <a:noFill/>
+        </p:spPr>
+        <p:txBody>
+          <a:bodyPr wrap="square" anchor="t" lIns="36000" rIns="36000" tIns="10800" bIns="10800">
+            <a:spAutoFit/>
+          </a:bodyPr>
+          <a:lstStyle/>
+          <a:p>
+            <a:pPr algn="l">
+              <a:lnSpc>
+                <a:spcPct val="105000"/>
+              </a:lnSpc>
+              <a:spcAft>
+                <a:spcPts val="200"/>
+              </a:spcAft>
+            </a:pPr>
+            <a:r>
+              <a:rPr sz="1300" b="1">
+                <a:solidFill>
+                  <a:srgbClr val="333333"/>
+                </a:solidFill>
+                <a:latin typeface="メイリオ"/>
+                <a:ea typeface="メイリオ"/>
+                <a:cs typeface="メイリオ"/>
+              </a:rPr>
+              <a:t>実績</a:t>
+            </a:r>
+          </a:p>
+        </p:txBody>
+      </p:sp>
+      <p:sp>
+        <p:nvSpPr>
+          <p:cNvPr id="28" name="TextBox 27"/>
+          <p:cNvSpPr txBox="1"/>
+          <p:nvPr/>
+        </p:nvSpPr>
+        <p:spPr>
+          <a:xfrm>
+            <a:off x="2426400" y="4287599"/>
+            <a:ext cx="6847199" cy="259200"/>
+          </a:xfrm>
+          <a:prstGeom prst="rect">
+            <a:avLst/>
+          </a:prstGeom>
+          <a:noFill/>
+        </p:spPr>
+        <p:txBody>
+          <a:bodyPr wrap="square" anchor="t" lIns="36000" rIns="36000" tIns="10800" bIns="10800">
+            <a:spAutoFit/>
+          </a:bodyPr>
+          <a:lstStyle/>
+          <a:p>
+            <a:pPr algn="l">
+              <a:lnSpc>
+                <a:spcPct val="105000"/>
+              </a:lnSpc>
+              <a:spcAft>
+                <a:spcPts val="200"/>
+              </a:spcAft>
+            </a:pPr>
+            <a:r>
+              <a:rPr sz="1300" b="0">
+                <a:solidFill>
+                  <a:srgbClr val="333333"/>
+                </a:solidFill>
+                <a:latin typeface="メイリオ"/>
+                <a:ea typeface="メイリオ"/>
+                <a:cs typeface="メイリオ"/>
+              </a:rPr>
+              <a:t>弊社運用の美容クリニックで、予約後の来院率 40〜50%改善</a:t>
+            </a:r>
+          </a:p>
+        </p:txBody>
+      </p:sp>
+      <p:sp>
+        <p:nvSpPr>
+          <p:cNvPr id="29" name="TextBox 28"/>
+          <p:cNvSpPr txBox="1"/>
+          <p:nvPr/>
+        </p:nvSpPr>
+        <p:spPr>
+          <a:xfrm>
+            <a:off x="770400" y="4546800"/>
+            <a:ext cx="1655999" cy="259200"/>
+          </a:xfrm>
+          <a:prstGeom prst="rect">
+            <a:avLst/>
+          </a:prstGeom>
+          <a:noFill/>
+        </p:spPr>
+        <p:txBody>
+          <a:bodyPr wrap="square" anchor="t" lIns="36000" rIns="36000" tIns="10800" bIns="10800">
+            <a:spAutoFit/>
+          </a:bodyPr>
+          <a:lstStyle/>
+          <a:p>
+            <a:pPr algn="l">
+              <a:lnSpc>
+                <a:spcPct val="105000"/>
+              </a:lnSpc>
+              <a:spcAft>
+                <a:spcPts val="200"/>
+              </a:spcAft>
+            </a:pPr>
+            <a:r>
+              <a:rPr sz="1300" b="1">
+                <a:solidFill>
+                  <a:srgbClr val="333333"/>
+                </a:solidFill>
+                <a:latin typeface="メイリオ"/>
+                <a:ea typeface="メイリオ"/>
+                <a:cs typeface="メイリオ"/>
+              </a:rPr>
+              <a:t>費用</a:t>
+            </a:r>
+          </a:p>
+        </p:txBody>
+      </p:sp>
+      <p:sp>
+        <p:nvSpPr>
+          <p:cNvPr id="30" name="TextBox 29"/>
+          <p:cNvSpPr txBox="1"/>
+          <p:nvPr/>
+        </p:nvSpPr>
+        <p:spPr>
+          <a:xfrm>
+            <a:off x="2426400" y="4546800"/>
+            <a:ext cx="6847199" cy="259200"/>
+          </a:xfrm>
+          <a:prstGeom prst="rect">
+            <a:avLst/>
+          </a:prstGeom>
+          <a:noFill/>
+        </p:spPr>
+        <p:txBody>
+          <a:bodyPr wrap="square" anchor="t" lIns="36000" rIns="36000" tIns="10800" bIns="10800">
+            <a:spAutoFit/>
+          </a:bodyPr>
+          <a:lstStyle/>
+          <a:p>
+            <a:pPr algn="l">
+              <a:lnSpc>
+                <a:spcPct val="105000"/>
+              </a:lnSpc>
+              <a:spcAft>
+                <a:spcPts val="200"/>
+              </a:spcAft>
+            </a:pPr>
+            <a:r>
+              <a:rPr sz="1300" b="0">
                 <a:solidFill>
                   <a:srgbClr val="333333"/>
                 </a:solidFill>
@@ -4387,14 +7426,58 @@
       </p:cxnSp>
       <p:sp>
         <p:nvSpPr>
-          <p:cNvPr id="6" name="TextBox 5"/>
+          <p:cNvPr id="6" name="Rectangle 5"/>
+          <p:cNvSpPr/>
+          <p:nvPr/>
+        </p:nvSpPr>
+        <p:spPr>
+          <a:xfrm>
+            <a:off x="644400" y="1670400"/>
+            <a:ext cx="54000" cy="180000"/>
+          </a:xfrm>
+          <a:prstGeom prst="rect">
+            <a:avLst/>
+          </a:prstGeom>
+          <a:solidFill>
+            <a:srgbClr val="1F285A"/>
+          </a:solidFill>
+          <a:ln>
+            <a:noFill/>
+          </a:ln>
+          <a:effectLst/>
+        </p:spPr>
+        <p:style>
+          <a:lnRef idx="1">
+            <a:schemeClr val="accent1"/>
+          </a:lnRef>
+          <a:fillRef idx="3">
+            <a:schemeClr val="accent1"/>
+          </a:fillRef>
+          <a:effectRef idx="0">
+            <a:schemeClr val="accent1"/>
+          </a:effectRef>
+          <a:fontRef idx="minor">
+            <a:schemeClr val="lt1"/>
+          </a:fontRef>
+        </p:style>
+        <p:txBody>
+          <a:bodyPr rtlCol="0" anchor="ctr" wrap="square" lIns="72000" tIns="18000" rIns="72000" bIns="18000"/>
+          <a:lstStyle/>
+          <a:p>
+            <a:pPr algn="ctr"/>
+          </a:p>
+        </p:txBody>
+      </p:sp>
+      <p:sp>
+        <p:nvSpPr>
+          <p:cNvPr id="7" name="TextBox 6"/>
           <p:cNvSpPr txBox="1"/>
           <p:nvPr/>
         </p:nvSpPr>
         <p:spPr>
           <a:xfrm>
-            <a:off x="644400" y="1728000"/>
-            <a:ext cx="1944000" cy="342000"/>
+            <a:off x="770400" y="1620000"/>
+            <a:ext cx="8503200" cy="288000"/>
           </a:xfrm>
           <a:prstGeom prst="rect">
             <a:avLst/>
@@ -4416,7 +7499,7 @@
               </a:spcAft>
             </a:pPr>
             <a:r>
-              <a:rPr sz="1600" b="1">
+              <a:rPr sz="1350" b="1">
                 <a:solidFill>
                   <a:srgbClr val="1F285A"/>
                 </a:solidFill>
@@ -4424,21 +7507,21 @@
                 <a:ea typeface="メイリオ"/>
                 <a:cs typeface="メイリオ"/>
               </a:rPr>
-              <a:t>登録直後</a:t>
-            </a:r>
-          </a:p>
-        </p:txBody>
-      </p:sp>
-      <p:sp>
-        <p:nvSpPr>
-          <p:cNvPr id="7" name="TextBox 6"/>
+              <a:t>配信のタイミングと内容</a:t>
+            </a:r>
+          </a:p>
+        </p:txBody>
+      </p:sp>
+      <p:sp>
+        <p:nvSpPr>
+          <p:cNvPr id="8" name="TextBox 7"/>
           <p:cNvSpPr txBox="1"/>
           <p:nvPr/>
         </p:nvSpPr>
         <p:spPr>
           <a:xfrm>
-            <a:off x="2588400" y="1728000"/>
-            <a:ext cx="6685200" cy="342000"/>
+            <a:off x="770400" y="1925999"/>
+            <a:ext cx="1152000" cy="259200"/>
           </a:xfrm>
           <a:prstGeom prst="rect">
             <a:avLst/>
@@ -4460,7 +7543,7 @@
               </a:spcAft>
             </a:pPr>
             <a:r>
-              <a:rPr sz="1600" b="0">
+              <a:rPr sz="1300" b="1">
                 <a:solidFill>
                   <a:srgbClr val="333333"/>
                 </a:solidFill>
@@ -4468,21 +7551,21 @@
                 <a:ea typeface="メイリオ"/>
                 <a:cs typeface="メイリオ"/>
               </a:rPr>
-              <a:t>概要・予約</a:t>
-            </a:r>
-          </a:p>
-        </p:txBody>
-      </p:sp>
-      <p:sp>
-        <p:nvSpPr>
-          <p:cNvPr id="8" name="TextBox 7"/>
+              <a:t>登録直後</a:t>
+            </a:r>
+          </a:p>
+        </p:txBody>
+      </p:sp>
+      <p:sp>
+        <p:nvSpPr>
+          <p:cNvPr id="9" name="TextBox 8"/>
           <p:cNvSpPr txBox="1"/>
           <p:nvPr/>
         </p:nvSpPr>
         <p:spPr>
           <a:xfrm>
-            <a:off x="644400" y="2070000"/>
-            <a:ext cx="1944000" cy="342000"/>
+            <a:off x="1922400" y="1925999"/>
+            <a:ext cx="2015999" cy="259200"/>
           </a:xfrm>
           <a:prstGeom prst="rect">
             <a:avLst/>
@@ -4504,29 +7587,29 @@
               </a:spcAft>
             </a:pPr>
             <a:r>
-              <a:rPr sz="1600" b="1">
-                <a:solidFill>
-                  <a:srgbClr val="1F285A"/>
-                </a:solidFill>
-                <a:latin typeface="メイリオ"/>
-                <a:ea typeface="メイリオ"/>
-                <a:cs typeface="メイリオ"/>
-              </a:rPr>
-              <a:t>2週間前</a:t>
-            </a:r>
-          </a:p>
-        </p:txBody>
-      </p:sp>
-      <p:sp>
-        <p:nvSpPr>
-          <p:cNvPr id="9" name="TextBox 8"/>
+              <a:rPr sz="1300" b="0">
+                <a:solidFill>
+                  <a:srgbClr val="333333"/>
+                </a:solidFill>
+                <a:latin typeface="メイリオ"/>
+                <a:ea typeface="メイリオ"/>
+                <a:cs typeface="メイリオ"/>
+              </a:rPr>
+              <a:t>概要・予約</a:t>
+            </a:r>
+          </a:p>
+        </p:txBody>
+      </p:sp>
+      <p:sp>
+        <p:nvSpPr>
+          <p:cNvPr id="10" name="TextBox 9"/>
           <p:cNvSpPr txBox="1"/>
           <p:nvPr/>
         </p:nvSpPr>
         <p:spPr>
           <a:xfrm>
-            <a:off x="2588400" y="2070000"/>
-            <a:ext cx="6685200" cy="342000"/>
+            <a:off x="3938400" y="1925999"/>
+            <a:ext cx="5335199" cy="259200"/>
           </a:xfrm>
           <a:prstGeom prst="rect">
             <a:avLst/>
@@ -4548,29 +7631,29 @@
               </a:spcAft>
             </a:pPr>
             <a:r>
-              <a:rPr sz="1600" b="0">
-                <a:solidFill>
-                  <a:srgbClr val="333333"/>
-                </a:solidFill>
-                <a:latin typeface="メイリオ"/>
-                <a:ea typeface="メイリオ"/>
-                <a:cs typeface="メイリオ"/>
-              </a:rPr>
-              <a:t>見どころ</a:t>
-            </a:r>
-          </a:p>
-        </p:txBody>
-      </p:sp>
-      <p:sp>
-        <p:nvSpPr>
-          <p:cNvPr id="10" name="TextBox 9"/>
+              <a:rPr sz="1200" b="0">
+                <a:solidFill>
+                  <a:srgbClr val="7F7F7F"/>
+                </a:solidFill>
+                <a:latin typeface="メイリオ"/>
+                <a:ea typeface="メイリオ"/>
+                <a:cs typeface="メイリオ"/>
+              </a:rPr>
+              <a:t>「〇月〇日から〇〇で展示会を開催します。ご予約はこちら」</a:t>
+            </a:r>
+          </a:p>
+        </p:txBody>
+      </p:sp>
+      <p:sp>
+        <p:nvSpPr>
+          <p:cNvPr id="11" name="TextBox 10"/>
           <p:cNvSpPr txBox="1"/>
           <p:nvPr/>
         </p:nvSpPr>
         <p:spPr>
           <a:xfrm>
-            <a:off x="644400" y="2411999"/>
-            <a:ext cx="1944000" cy="342000"/>
+            <a:off x="770400" y="2185200"/>
+            <a:ext cx="1152000" cy="259200"/>
           </a:xfrm>
           <a:prstGeom prst="rect">
             <a:avLst/>
@@ -4592,29 +7675,29 @@
               </a:spcAft>
             </a:pPr>
             <a:r>
-              <a:rPr sz="1600" b="1">
-                <a:solidFill>
-                  <a:srgbClr val="1F285A"/>
-                </a:solidFill>
-                <a:latin typeface="メイリオ"/>
-                <a:ea typeface="メイリオ"/>
-                <a:cs typeface="メイリオ"/>
-              </a:rPr>
-              <a:t>3日前</a:t>
-            </a:r>
-          </a:p>
-        </p:txBody>
-      </p:sp>
-      <p:sp>
-        <p:nvSpPr>
-          <p:cNvPr id="11" name="TextBox 10"/>
+              <a:rPr sz="1300" b="1">
+                <a:solidFill>
+                  <a:srgbClr val="333333"/>
+                </a:solidFill>
+                <a:latin typeface="メイリオ"/>
+                <a:ea typeface="メイリオ"/>
+                <a:cs typeface="メイリオ"/>
+              </a:rPr>
+              <a:t>2週間前</a:t>
+            </a:r>
+          </a:p>
+        </p:txBody>
+      </p:sp>
+      <p:sp>
+        <p:nvSpPr>
+          <p:cNvPr id="12" name="TextBox 11"/>
           <p:cNvSpPr txBox="1"/>
           <p:nvPr/>
         </p:nvSpPr>
         <p:spPr>
           <a:xfrm>
-            <a:off x="2588400" y="2411999"/>
-            <a:ext cx="6685200" cy="342000"/>
+            <a:off x="1922400" y="2185200"/>
+            <a:ext cx="2015999" cy="259200"/>
           </a:xfrm>
           <a:prstGeom prst="rect">
             <a:avLst/>
@@ -4636,7 +7719,7 @@
               </a:spcAft>
             </a:pPr>
             <a:r>
-              <a:rPr sz="1600" b="0">
+              <a:rPr sz="1300" b="0">
                 <a:solidFill>
                   <a:srgbClr val="333333"/>
                 </a:solidFill>
@@ -4644,21 +7727,21 @@
                 <a:ea typeface="メイリオ"/>
                 <a:cs typeface="メイリオ"/>
               </a:rPr>
-              <a:t>リマインド・アクセス</a:t>
-            </a:r>
-          </a:p>
-        </p:txBody>
-      </p:sp>
-      <p:sp>
-        <p:nvSpPr>
-          <p:cNvPr id="12" name="TextBox 11"/>
+              <a:t>見どころ</a:t>
+            </a:r>
+          </a:p>
+        </p:txBody>
+      </p:sp>
+      <p:sp>
+        <p:nvSpPr>
+          <p:cNvPr id="13" name="TextBox 12"/>
           <p:cNvSpPr txBox="1"/>
           <p:nvPr/>
         </p:nvSpPr>
         <p:spPr>
           <a:xfrm>
-            <a:off x="644400" y="2754000"/>
-            <a:ext cx="1944000" cy="342000"/>
+            <a:off x="3938400" y="2185200"/>
+            <a:ext cx="5335199" cy="259200"/>
           </a:xfrm>
           <a:prstGeom prst="rect">
             <a:avLst/>
@@ -4680,29 +7763,29 @@
               </a:spcAft>
             </a:pPr>
             <a:r>
-              <a:rPr sz="1600" b="1">
-                <a:solidFill>
-                  <a:srgbClr val="1F285A"/>
-                </a:solidFill>
-                <a:latin typeface="メイリオ"/>
-                <a:ea typeface="メイリオ"/>
-                <a:cs typeface="メイリオ"/>
-              </a:rPr>
-              <a:t>当日朝</a:t>
-            </a:r>
-          </a:p>
-        </p:txBody>
-      </p:sp>
-      <p:sp>
-        <p:nvSpPr>
-          <p:cNvPr id="13" name="TextBox 12"/>
+              <a:rPr sz="1200" b="0">
+                <a:solidFill>
+                  <a:srgbClr val="7F7F7F"/>
+                </a:solidFill>
+                <a:latin typeface="メイリオ"/>
+                <a:ea typeface="メイリオ"/>
+                <a:cs typeface="メイリオ"/>
+              </a:rPr>
+              <a:t>「今回の見どころをご紹介します」</a:t>
+            </a:r>
+          </a:p>
+        </p:txBody>
+      </p:sp>
+      <p:sp>
+        <p:nvSpPr>
+          <p:cNvPr id="14" name="TextBox 13"/>
           <p:cNvSpPr txBox="1"/>
           <p:nvPr/>
         </p:nvSpPr>
         <p:spPr>
           <a:xfrm>
-            <a:off x="2588400" y="2754000"/>
-            <a:ext cx="6685200" cy="342000"/>
+            <a:off x="770400" y="2444399"/>
+            <a:ext cx="1152000" cy="259200"/>
           </a:xfrm>
           <a:prstGeom prst="rect">
             <a:avLst/>
@@ -4724,7 +7807,7 @@
               </a:spcAft>
             </a:pPr>
             <a:r>
-              <a:rPr sz="1600" b="0">
+              <a:rPr sz="1300" b="1">
                 <a:solidFill>
                   <a:srgbClr val="333333"/>
                 </a:solidFill>
@@ -4732,21 +7815,21 @@
                 <a:ea typeface="メイリオ"/>
                 <a:cs typeface="メイリオ"/>
               </a:rPr>
-              <a:t>開催のお知らせ</a:t>
-            </a:r>
-          </a:p>
-        </p:txBody>
-      </p:sp>
-      <p:sp>
-        <p:nvSpPr>
-          <p:cNvPr id="14" name="TextBox 13"/>
+              <a:t>3日前</a:t>
+            </a:r>
+          </a:p>
+        </p:txBody>
+      </p:sp>
+      <p:sp>
+        <p:nvSpPr>
+          <p:cNvPr id="15" name="TextBox 14"/>
           <p:cNvSpPr txBox="1"/>
           <p:nvPr/>
         </p:nvSpPr>
         <p:spPr>
           <a:xfrm>
-            <a:off x="644400" y="3096000"/>
-            <a:ext cx="1944000" cy="342000"/>
+            <a:off x="1922400" y="2444399"/>
+            <a:ext cx="2015999" cy="259200"/>
           </a:xfrm>
           <a:prstGeom prst="rect">
             <a:avLst/>
@@ -4768,29 +7851,29 @@
               </a:spcAft>
             </a:pPr>
             <a:r>
-              <a:rPr sz="1600" b="1">
-                <a:solidFill>
-                  <a:srgbClr val="1F285A"/>
-                </a:solidFill>
-                <a:latin typeface="メイリオ"/>
-                <a:ea typeface="メイリオ"/>
-                <a:cs typeface="メイリオ"/>
-              </a:rPr>
-              <a:t>終了後</a:t>
-            </a:r>
-          </a:p>
-        </p:txBody>
-      </p:sp>
-      <p:sp>
-        <p:nvSpPr>
-          <p:cNvPr id="15" name="TextBox 14"/>
+              <a:rPr sz="1300" b="0">
+                <a:solidFill>
+                  <a:srgbClr val="333333"/>
+                </a:solidFill>
+                <a:latin typeface="メイリオ"/>
+                <a:ea typeface="メイリオ"/>
+                <a:cs typeface="メイリオ"/>
+              </a:rPr>
+              <a:t>リマインド・アクセス</a:t>
+            </a:r>
+          </a:p>
+        </p:txBody>
+      </p:sp>
+      <p:sp>
+        <p:nvSpPr>
+          <p:cNvPr id="16" name="TextBox 15"/>
           <p:cNvSpPr txBox="1"/>
           <p:nvPr/>
         </p:nvSpPr>
         <p:spPr>
           <a:xfrm>
-            <a:off x="2588400" y="3096000"/>
-            <a:ext cx="6685200" cy="342000"/>
+            <a:off x="3938400" y="2444399"/>
+            <a:ext cx="5335199" cy="259200"/>
           </a:xfrm>
           <a:prstGeom prst="rect">
             <a:avLst/>
@@ -4812,29 +7895,29 @@
               </a:spcAft>
             </a:pPr>
             <a:r>
-              <a:rPr sz="1600" b="0">
-                <a:solidFill>
-                  <a:srgbClr val="333333"/>
-                </a:solidFill>
-                <a:latin typeface="メイリオ"/>
-                <a:ea typeface="メイリオ"/>
-                <a:cs typeface="メイリオ"/>
-              </a:rPr>
-              <a:t>お礼・次回案内</a:t>
-            </a:r>
-          </a:p>
-        </p:txBody>
-      </p:sp>
-      <p:sp>
-        <p:nvSpPr>
-          <p:cNvPr id="16" name="TextBox 15"/>
+              <a:rPr sz="1200" b="0">
+                <a:solidFill>
+                  <a:srgbClr val="7F7F7F"/>
+                </a:solidFill>
+                <a:latin typeface="メイリオ"/>
+                <a:ea typeface="メイリオ"/>
+                <a:cs typeface="メイリオ"/>
+              </a:rPr>
+              <a:t>「ご来場まであと3日です。会場へのアクセスはこちら」</a:t>
+            </a:r>
+          </a:p>
+        </p:txBody>
+      </p:sp>
+      <p:sp>
+        <p:nvSpPr>
+          <p:cNvPr id="17" name="TextBox 16"/>
           <p:cNvSpPr txBox="1"/>
           <p:nvPr/>
         </p:nvSpPr>
         <p:spPr>
           <a:xfrm>
-            <a:off x="644400" y="3654000"/>
-            <a:ext cx="1944000" cy="342000"/>
+            <a:off x="770400" y="2703600"/>
+            <a:ext cx="1152000" cy="259200"/>
           </a:xfrm>
           <a:prstGeom prst="rect">
             <a:avLst/>
@@ -4856,29 +7939,29 @@
               </a:spcAft>
             </a:pPr>
             <a:r>
-              <a:rPr sz="1600" b="1">
-                <a:solidFill>
-                  <a:srgbClr val="1F285A"/>
-                </a:solidFill>
-                <a:latin typeface="メイリオ"/>
-                <a:ea typeface="メイリオ"/>
-                <a:cs typeface="メイリオ"/>
-              </a:rPr>
-              <a:t>予約</a:t>
-            </a:r>
-          </a:p>
-        </p:txBody>
-      </p:sp>
-      <p:sp>
-        <p:nvSpPr>
-          <p:cNvPr id="17" name="TextBox 16"/>
+              <a:rPr sz="1300" b="1">
+                <a:solidFill>
+                  <a:srgbClr val="333333"/>
+                </a:solidFill>
+                <a:latin typeface="メイリオ"/>
+                <a:ea typeface="メイリオ"/>
+                <a:cs typeface="メイリオ"/>
+              </a:rPr>
+              <a:t>当日朝</a:t>
+            </a:r>
+          </a:p>
+        </p:txBody>
+      </p:sp>
+      <p:sp>
+        <p:nvSpPr>
+          <p:cNvPr id="18" name="TextBox 17"/>
           <p:cNvSpPr txBox="1"/>
           <p:nvPr/>
         </p:nvSpPr>
         <p:spPr>
           <a:xfrm>
-            <a:off x="2588400" y="3654000"/>
-            <a:ext cx="6685200" cy="342000"/>
+            <a:off x="1922400" y="2703600"/>
+            <a:ext cx="2015999" cy="259200"/>
           </a:xfrm>
           <a:prstGeom prst="rect">
             <a:avLst/>
@@ -4900,7 +7983,7 @@
               </a:spcAft>
             </a:pPr>
             <a:r>
-              <a:rPr sz="1600" b="0">
+              <a:rPr sz="1300" b="0">
                 <a:solidFill>
                   <a:srgbClr val="333333"/>
                 </a:solidFill>
@@ -4908,21 +7991,21 @@
                 <a:ea typeface="メイリオ"/>
                 <a:cs typeface="メイリオ"/>
               </a:rPr>
-              <a:t>仮に 26件／月</a:t>
-            </a:r>
-          </a:p>
-        </p:txBody>
-      </p:sp>
-      <p:sp>
-        <p:nvSpPr>
-          <p:cNvPr id="18" name="TextBox 17"/>
+              <a:t>開催のお知らせ</a:t>
+            </a:r>
+          </a:p>
+        </p:txBody>
+      </p:sp>
+      <p:sp>
+        <p:nvSpPr>
+          <p:cNvPr id="19" name="TextBox 18"/>
           <p:cNvSpPr txBox="1"/>
           <p:nvPr/>
         </p:nvSpPr>
         <p:spPr>
           <a:xfrm>
-            <a:off x="644400" y="3996000"/>
-            <a:ext cx="1944000" cy="342000"/>
+            <a:off x="3938400" y="2703600"/>
+            <a:ext cx="5335199" cy="259200"/>
           </a:xfrm>
           <a:prstGeom prst="rect">
             <a:avLst/>
@@ -4944,29 +8027,29 @@
               </a:spcAft>
             </a:pPr>
             <a:r>
-              <a:rPr sz="1600" b="1">
-                <a:solidFill>
-                  <a:srgbClr val="1F285A"/>
-                </a:solidFill>
-                <a:latin typeface="メイリオ"/>
-                <a:ea typeface="メイリオ"/>
-                <a:cs typeface="メイリオ"/>
-              </a:rPr>
-              <a:t>予約1件あたり</a:t>
-            </a:r>
-          </a:p>
-        </p:txBody>
-      </p:sp>
-      <p:sp>
-        <p:nvSpPr>
-          <p:cNvPr id="19" name="TextBox 18"/>
+              <a:rPr sz="1200" b="0">
+                <a:solidFill>
+                  <a:srgbClr val="7F7F7F"/>
+                </a:solidFill>
+                <a:latin typeface="メイリオ"/>
+                <a:ea typeface="メイリオ"/>
+                <a:cs typeface="メイリオ"/>
+              </a:rPr>
+              <a:t>「本日開催です。お気をつけてお越しください」</a:t>
+            </a:r>
+          </a:p>
+        </p:txBody>
+      </p:sp>
+      <p:sp>
+        <p:nvSpPr>
+          <p:cNvPr id="20" name="TextBox 19"/>
           <p:cNvSpPr txBox="1"/>
           <p:nvPr/>
         </p:nvSpPr>
         <p:spPr>
           <a:xfrm>
-            <a:off x="2588400" y="3996000"/>
-            <a:ext cx="6685200" cy="342000"/>
+            <a:off x="770400" y="2962800"/>
+            <a:ext cx="1152000" cy="259200"/>
           </a:xfrm>
           <a:prstGeom prst="rect">
             <a:avLst/>
@@ -4988,7 +8071,7 @@
               </a:spcAft>
             </a:pPr>
             <a:r>
-              <a:rPr sz="1600" b="0">
+              <a:rPr sz="1300" b="1">
                 <a:solidFill>
                   <a:srgbClr val="333333"/>
                 </a:solidFill>
@@ -4996,7 +8079,491 @@
                 <a:ea typeface="メイリオ"/>
                 <a:cs typeface="メイリオ"/>
               </a:rPr>
+              <a:t>終了後</a:t>
+            </a:r>
+          </a:p>
+        </p:txBody>
+      </p:sp>
+      <p:sp>
+        <p:nvSpPr>
+          <p:cNvPr id="21" name="TextBox 20"/>
+          <p:cNvSpPr txBox="1"/>
+          <p:nvPr/>
+        </p:nvSpPr>
+        <p:spPr>
+          <a:xfrm>
+            <a:off x="1922400" y="2962800"/>
+            <a:ext cx="2015999" cy="259200"/>
+          </a:xfrm>
+          <a:prstGeom prst="rect">
+            <a:avLst/>
+          </a:prstGeom>
+          <a:noFill/>
+        </p:spPr>
+        <p:txBody>
+          <a:bodyPr wrap="square" anchor="t" lIns="36000" rIns="36000" tIns="10800" bIns="10800">
+            <a:spAutoFit/>
+          </a:bodyPr>
+          <a:lstStyle/>
+          <a:p>
+            <a:pPr algn="l">
+              <a:lnSpc>
+                <a:spcPct val="105000"/>
+              </a:lnSpc>
+              <a:spcAft>
+                <a:spcPts val="200"/>
+              </a:spcAft>
+            </a:pPr>
+            <a:r>
+              <a:rPr sz="1300" b="0">
+                <a:solidFill>
+                  <a:srgbClr val="333333"/>
+                </a:solidFill>
+                <a:latin typeface="メイリオ"/>
+                <a:ea typeface="メイリオ"/>
+                <a:cs typeface="メイリオ"/>
+              </a:rPr>
+              <a:t>お礼・次回案内</a:t>
+            </a:r>
+          </a:p>
+        </p:txBody>
+      </p:sp>
+      <p:sp>
+        <p:nvSpPr>
+          <p:cNvPr id="22" name="TextBox 21"/>
+          <p:cNvSpPr txBox="1"/>
+          <p:nvPr/>
+        </p:nvSpPr>
+        <p:spPr>
+          <a:xfrm>
+            <a:off x="3938400" y="2962800"/>
+            <a:ext cx="5335199" cy="259200"/>
+          </a:xfrm>
+          <a:prstGeom prst="rect">
+            <a:avLst/>
+          </a:prstGeom>
+          <a:noFill/>
+        </p:spPr>
+        <p:txBody>
+          <a:bodyPr wrap="square" anchor="t" lIns="36000" rIns="36000" tIns="10800" bIns="10800">
+            <a:spAutoFit/>
+          </a:bodyPr>
+          <a:lstStyle/>
+          <a:p>
+            <a:pPr algn="l">
+              <a:lnSpc>
+                <a:spcPct val="105000"/>
+              </a:lnSpc>
+              <a:spcAft>
+                <a:spcPts val="200"/>
+              </a:spcAft>
+            </a:pPr>
+            <a:r>
+              <a:rPr sz="1200" b="0">
+                <a:solidFill>
+                  <a:srgbClr val="7F7F7F"/>
+                </a:solidFill>
+                <a:latin typeface="メイリオ"/>
+                <a:ea typeface="メイリオ"/>
+                <a:cs typeface="メイリオ"/>
+              </a:rPr>
+              <a:t>「ご来場ありがとうございました。次回もご案内します」</a:t>
+            </a:r>
+          </a:p>
+        </p:txBody>
+      </p:sp>
+      <p:sp>
+        <p:nvSpPr>
+          <p:cNvPr id="23" name="Rectangle 22"/>
+          <p:cNvSpPr/>
+          <p:nvPr/>
+        </p:nvSpPr>
+        <p:spPr>
+          <a:xfrm>
+            <a:off x="644400" y="3452400"/>
+            <a:ext cx="54000" cy="180000"/>
+          </a:xfrm>
+          <a:prstGeom prst="rect">
+            <a:avLst/>
+          </a:prstGeom>
+          <a:solidFill>
+            <a:srgbClr val="1F285A"/>
+          </a:solidFill>
+          <a:ln>
+            <a:noFill/>
+          </a:ln>
+          <a:effectLst/>
+        </p:spPr>
+        <p:style>
+          <a:lnRef idx="1">
+            <a:schemeClr val="accent1"/>
+          </a:lnRef>
+          <a:fillRef idx="3">
+            <a:schemeClr val="accent1"/>
+          </a:fillRef>
+          <a:effectRef idx="0">
+            <a:schemeClr val="accent1"/>
+          </a:effectRef>
+          <a:fontRef idx="minor">
+            <a:schemeClr val="lt1"/>
+          </a:fontRef>
+        </p:style>
+        <p:txBody>
+          <a:bodyPr rtlCol="0" anchor="ctr" wrap="square" lIns="72000" tIns="18000" rIns="72000" bIns="18000"/>
+          <a:lstStyle/>
+          <a:p>
+            <a:pPr algn="ctr"/>
+          </a:p>
+        </p:txBody>
+      </p:sp>
+      <p:sp>
+        <p:nvSpPr>
+          <p:cNvPr id="24" name="TextBox 23"/>
+          <p:cNvSpPr txBox="1"/>
+          <p:nvPr/>
+        </p:nvSpPr>
+        <p:spPr>
+          <a:xfrm>
+            <a:off x="770400" y="3401999"/>
+            <a:ext cx="8503200" cy="288000"/>
+          </a:xfrm>
+          <a:prstGeom prst="rect">
+            <a:avLst/>
+          </a:prstGeom>
+          <a:noFill/>
+        </p:spPr>
+        <p:txBody>
+          <a:bodyPr wrap="square" anchor="t" lIns="36000" rIns="36000" tIns="10800" bIns="10800">
+            <a:spAutoFit/>
+          </a:bodyPr>
+          <a:lstStyle/>
+          <a:p>
+            <a:pPr algn="l">
+              <a:lnSpc>
+                <a:spcPct val="105000"/>
+              </a:lnSpc>
+              <a:spcAft>
+                <a:spcPts val="200"/>
+              </a:spcAft>
+            </a:pPr>
+            <a:r>
+              <a:rPr sz="1350" b="1">
+                <a:solidFill>
+                  <a:srgbClr val="1F285A"/>
+                </a:solidFill>
+                <a:latin typeface="メイリオ"/>
+                <a:ea typeface="メイリオ"/>
+                <a:cs typeface="メイリオ"/>
+              </a:rPr>
+              <a:t>仮の数値（月）</a:t>
+            </a:r>
+          </a:p>
+        </p:txBody>
+      </p:sp>
+      <p:sp>
+        <p:nvSpPr>
+          <p:cNvPr id="25" name="TextBox 24"/>
+          <p:cNvSpPr txBox="1"/>
+          <p:nvPr/>
+        </p:nvSpPr>
+        <p:spPr>
+          <a:xfrm>
+            <a:off x="770400" y="3707999"/>
+            <a:ext cx="1655999" cy="259200"/>
+          </a:xfrm>
+          <a:prstGeom prst="rect">
+            <a:avLst/>
+          </a:prstGeom>
+          <a:noFill/>
+        </p:spPr>
+        <p:txBody>
+          <a:bodyPr wrap="square" anchor="t" lIns="36000" rIns="36000" tIns="10800" bIns="10800">
+            <a:spAutoFit/>
+          </a:bodyPr>
+          <a:lstStyle/>
+          <a:p>
+            <a:pPr algn="l">
+              <a:lnSpc>
+                <a:spcPct val="105000"/>
+              </a:lnSpc>
+              <a:spcAft>
+                <a:spcPts val="200"/>
+              </a:spcAft>
+            </a:pPr>
+            <a:r>
+              <a:rPr sz="1300" b="1">
+                <a:solidFill>
+                  <a:srgbClr val="333333"/>
+                </a:solidFill>
+                <a:latin typeface="メイリオ"/>
+                <a:ea typeface="メイリオ"/>
+                <a:cs typeface="メイリオ"/>
+              </a:rPr>
+              <a:t>予約</a:t>
+            </a:r>
+          </a:p>
+        </p:txBody>
+      </p:sp>
+      <p:sp>
+        <p:nvSpPr>
+          <p:cNvPr id="26" name="TextBox 25"/>
+          <p:cNvSpPr txBox="1"/>
+          <p:nvPr/>
+        </p:nvSpPr>
+        <p:spPr>
+          <a:xfrm>
+            <a:off x="2426400" y="3707999"/>
+            <a:ext cx="6847199" cy="259200"/>
+          </a:xfrm>
+          <a:prstGeom prst="rect">
+            <a:avLst/>
+          </a:prstGeom>
+          <a:noFill/>
+        </p:spPr>
+        <p:txBody>
+          <a:bodyPr wrap="square" anchor="t" lIns="36000" rIns="36000" tIns="10800" bIns="10800">
+            <a:spAutoFit/>
+          </a:bodyPr>
+          <a:lstStyle/>
+          <a:p>
+            <a:pPr algn="l">
+              <a:lnSpc>
+                <a:spcPct val="105000"/>
+              </a:lnSpc>
+              <a:spcAft>
+                <a:spcPts val="200"/>
+              </a:spcAft>
+            </a:pPr>
+            <a:r>
+              <a:rPr sz="1300" b="0">
+                <a:solidFill>
+                  <a:srgbClr val="333333"/>
+                </a:solidFill>
+                <a:latin typeface="メイリオ"/>
+                <a:ea typeface="メイリオ"/>
+                <a:cs typeface="メイリオ"/>
+              </a:rPr>
+              <a:t>26件（LINE広告 20件＋今の友だちへの配信 6件）</a:t>
+            </a:r>
+          </a:p>
+        </p:txBody>
+      </p:sp>
+      <p:sp>
+        <p:nvSpPr>
+          <p:cNvPr id="27" name="TextBox 26"/>
+          <p:cNvSpPr txBox="1"/>
+          <p:nvPr/>
+        </p:nvSpPr>
+        <p:spPr>
+          <a:xfrm>
+            <a:off x="770400" y="3967200"/>
+            <a:ext cx="1655999" cy="259200"/>
+          </a:xfrm>
+          <a:prstGeom prst="rect">
+            <a:avLst/>
+          </a:prstGeom>
+          <a:noFill/>
+        </p:spPr>
+        <p:txBody>
+          <a:bodyPr wrap="square" anchor="t" lIns="36000" rIns="36000" tIns="10800" bIns="10800">
+            <a:spAutoFit/>
+          </a:bodyPr>
+          <a:lstStyle/>
+          <a:p>
+            <a:pPr algn="l">
+              <a:lnSpc>
+                <a:spcPct val="105000"/>
+              </a:lnSpc>
+              <a:spcAft>
+                <a:spcPts val="200"/>
+              </a:spcAft>
+            </a:pPr>
+            <a:r>
+              <a:rPr sz="1300" b="1">
+                <a:solidFill>
+                  <a:srgbClr val="333333"/>
+                </a:solidFill>
+                <a:latin typeface="メイリオ"/>
+                <a:ea typeface="メイリオ"/>
+                <a:cs typeface="メイリオ"/>
+              </a:rPr>
+              <a:t>費用</a:t>
+            </a:r>
+          </a:p>
+        </p:txBody>
+      </p:sp>
+      <p:sp>
+        <p:nvSpPr>
+          <p:cNvPr id="28" name="TextBox 27"/>
+          <p:cNvSpPr txBox="1"/>
+          <p:nvPr/>
+        </p:nvSpPr>
+        <p:spPr>
+          <a:xfrm>
+            <a:off x="2426400" y="3967200"/>
+            <a:ext cx="6847199" cy="259200"/>
+          </a:xfrm>
+          <a:prstGeom prst="rect">
+            <a:avLst/>
+          </a:prstGeom>
+          <a:noFill/>
+        </p:spPr>
+        <p:txBody>
+          <a:bodyPr wrap="square" anchor="t" lIns="36000" rIns="36000" tIns="10800" bIns="10800">
+            <a:spAutoFit/>
+          </a:bodyPr>
+          <a:lstStyle/>
+          <a:p>
+            <a:pPr algn="l">
+              <a:lnSpc>
+                <a:spcPct val="105000"/>
+              </a:lnSpc>
+              <a:spcAft>
+                <a:spcPts val="200"/>
+              </a:spcAft>
+            </a:pPr>
+            <a:r>
+              <a:rPr sz="1300" b="0">
+                <a:solidFill>
+                  <a:srgbClr val="333333"/>
+                </a:solidFill>
+                <a:latin typeface="メイリオ"/>
+                <a:ea typeface="メイリオ"/>
+                <a:cs typeface="メイリオ"/>
+              </a:rPr>
+              <a:t>23万円（LINE広告 20万円＋サンクスLINE 3万円）</a:t>
+            </a:r>
+          </a:p>
+        </p:txBody>
+      </p:sp>
+      <p:sp>
+        <p:nvSpPr>
+          <p:cNvPr id="29" name="TextBox 28"/>
+          <p:cNvSpPr txBox="1"/>
+          <p:nvPr/>
+        </p:nvSpPr>
+        <p:spPr>
+          <a:xfrm>
+            <a:off x="770400" y="4226399"/>
+            <a:ext cx="1655999" cy="259200"/>
+          </a:xfrm>
+          <a:prstGeom prst="rect">
+            <a:avLst/>
+          </a:prstGeom>
+          <a:noFill/>
+        </p:spPr>
+        <p:txBody>
+          <a:bodyPr wrap="square" anchor="t" lIns="36000" rIns="36000" tIns="10800" bIns="10800">
+            <a:spAutoFit/>
+          </a:bodyPr>
+          <a:lstStyle/>
+          <a:p>
+            <a:pPr algn="l">
+              <a:lnSpc>
+                <a:spcPct val="105000"/>
+              </a:lnSpc>
+              <a:spcAft>
+                <a:spcPts val="200"/>
+              </a:spcAft>
+            </a:pPr>
+            <a:r>
+              <a:rPr sz="1300" b="1">
+                <a:solidFill>
+                  <a:srgbClr val="333333"/>
+                </a:solidFill>
+                <a:latin typeface="メイリオ"/>
+                <a:ea typeface="メイリオ"/>
+                <a:cs typeface="メイリオ"/>
+              </a:rPr>
+              <a:t>予約1件あたり</a:t>
+            </a:r>
+          </a:p>
+        </p:txBody>
+      </p:sp>
+      <p:sp>
+        <p:nvSpPr>
+          <p:cNvPr id="30" name="TextBox 29"/>
+          <p:cNvSpPr txBox="1"/>
+          <p:nvPr/>
+        </p:nvSpPr>
+        <p:spPr>
+          <a:xfrm>
+            <a:off x="2426400" y="4226399"/>
+            <a:ext cx="6847199" cy="259200"/>
+          </a:xfrm>
+          <a:prstGeom prst="rect">
+            <a:avLst/>
+          </a:prstGeom>
+          <a:noFill/>
+        </p:spPr>
+        <p:txBody>
+          <a:bodyPr wrap="square" anchor="t" lIns="36000" rIns="36000" tIns="10800" bIns="10800">
+            <a:spAutoFit/>
+          </a:bodyPr>
+          <a:lstStyle/>
+          <a:p>
+            <a:pPr algn="l">
+              <a:lnSpc>
+                <a:spcPct val="105000"/>
+              </a:lnSpc>
+              <a:spcAft>
+                <a:spcPts val="200"/>
+              </a:spcAft>
+            </a:pPr>
+            <a:r>
+              <a:rPr sz="1300" b="0">
+                <a:solidFill>
+                  <a:srgbClr val="333333"/>
+                </a:solidFill>
+                <a:latin typeface="メイリオ"/>
+                <a:ea typeface="メイリオ"/>
+                <a:cs typeface="メイリオ"/>
+              </a:rPr>
               <a:t>8,846円（現状：15,000円以上）</a:t>
+            </a:r>
+          </a:p>
+        </p:txBody>
+      </p:sp>
+      <p:sp>
+        <p:nvSpPr>
+          <p:cNvPr id="31" name="TextBox 30"/>
+          <p:cNvSpPr txBox="1"/>
+          <p:nvPr/>
+        </p:nvSpPr>
+        <p:spPr>
+          <a:xfrm>
+            <a:off x="644400" y="4557599"/>
+            <a:ext cx="8629200" cy="216000"/>
+          </a:xfrm>
+          <a:prstGeom prst="rect">
+            <a:avLst/>
+          </a:prstGeom>
+          <a:noFill/>
+        </p:spPr>
+        <p:txBody>
+          <a:bodyPr wrap="square" anchor="t" lIns="36000" rIns="36000" tIns="10800" bIns="10800">
+            <a:spAutoFit/>
+          </a:bodyPr>
+          <a:lstStyle/>
+          <a:p>
+            <a:pPr algn="l">
+              <a:lnSpc>
+                <a:spcPct val="105000"/>
+              </a:lnSpc>
+              <a:spcAft>
+                <a:spcPts val="200"/>
+              </a:spcAft>
+            </a:pPr>
+            <a:r>
+              <a:rPr sz="1050" b="0">
+                <a:solidFill>
+                  <a:srgbClr val="7F7F7F"/>
+                </a:solidFill>
+                <a:latin typeface="メイリオ"/>
+                <a:ea typeface="メイリオ"/>
+                <a:cs typeface="メイリオ"/>
+              </a:rPr>
+              <a:t>※今の友だちへの配信は、仮に友だち3,000人・クリック率20%・予約率1.0%で計算</a:t>
             </a:r>
           </a:p>
         </p:txBody>

--- a/20261009_展示会LINE運用方針.pptx
+++ b/20261009_展示会LINE運用方針.pptx
@@ -8343,7 +8343,7 @@
                 <a:ea typeface="メイリオ"/>
                 <a:cs typeface="メイリオ"/>
               </a:rPr>
-              <a:t>26件（LINE広告 20件＋今の友だちへの配信 6件）</a:t>
+              <a:t>20件（LINE広告）</a:t>
             </a:r>
           </a:p>
         </p:txBody>
@@ -8519,51 +8519,7 @@
                 <a:ea typeface="メイリオ"/>
                 <a:cs typeface="メイリオ"/>
               </a:rPr>
-              <a:t>8,846円（現状：15,000円以上）</a:t>
-            </a:r>
-          </a:p>
-        </p:txBody>
-      </p:sp>
-      <p:sp>
-        <p:nvSpPr>
-          <p:cNvPr id="31" name="TextBox 30"/>
-          <p:cNvSpPr txBox="1"/>
-          <p:nvPr/>
-        </p:nvSpPr>
-        <p:spPr>
-          <a:xfrm>
-            <a:off x="644400" y="4557599"/>
-            <a:ext cx="8629200" cy="216000"/>
-          </a:xfrm>
-          <a:prstGeom prst="rect">
-            <a:avLst/>
-          </a:prstGeom>
-          <a:noFill/>
-        </p:spPr>
-        <p:txBody>
-          <a:bodyPr wrap="square" anchor="t" lIns="36000" rIns="36000" tIns="10800" bIns="10800">
-            <a:spAutoFit/>
-          </a:bodyPr>
-          <a:lstStyle/>
-          <a:p>
-            <a:pPr algn="l">
-              <a:lnSpc>
-                <a:spcPct val="105000"/>
-              </a:lnSpc>
-              <a:spcAft>
-                <a:spcPts val="200"/>
-              </a:spcAft>
-            </a:pPr>
-            <a:r>
-              <a:rPr sz="1050" b="0">
-                <a:solidFill>
-                  <a:srgbClr val="7F7F7F"/>
-                </a:solidFill>
-                <a:latin typeface="メイリオ"/>
-                <a:ea typeface="メイリオ"/>
-                <a:cs typeface="メイリオ"/>
-              </a:rPr>
-              <a:t>※今の友だちへの配信は、仮に友だち3,000人・クリック率20%・予約率1.0%で計算</a:t>
+              <a:t>11,500円（現状：15,000円以上）</a:t>
             </a:r>
           </a:p>
         </p:txBody>

--- a/20261009_展示会LINE運用方針.pptx
+++ b/20261009_展示会LINE運用方針.pptx
@@ -3897,7 +3897,7 @@
                 <a:ea typeface="メイリオ"/>
                 <a:cs typeface="メイリオ"/>
               </a:rPr>
-              <a:t>オーディエンスに対して予算が多いエリアを削り、新規予算10〜30万円をつくる</a:t>
+              <a:t>店舗ごとに、今の広告費の中でMeta広告の一部をLINE広告に振り替える</a:t>
             </a:r>
             <a:endParaRPr sz="1050" dirty="0">
               <a:solidFill>
@@ -4072,7 +4072,7 @@
                 <a:ea typeface="メイリオ"/>
                 <a:cs typeface="メイリオ"/>
               </a:rPr>
-              <a:t>削る順番</a:t>
+              <a:t>削る店舗</a:t>
             </a:r>
           </a:p>
         </p:txBody>
@@ -4116,7 +4116,7 @@
                 <a:ea typeface="メイリオ"/>
                 <a:cs typeface="メイリオ"/>
               </a:rPr>
-              <a:t>オーディエンス数に対して予算が多いエリアから削る</a:t>
+              <a:t>オーディエンス数に対して予算が多い店舗（エリア）</a:t>
             </a:r>
           </a:p>
         </p:txBody>
@@ -4160,7 +4160,7 @@
                 <a:ea typeface="メイリオ"/>
                 <a:cs typeface="メイリオ"/>
               </a:rPr>
-              <a:t>例</a:t>
+              <a:t>削る分</a:t>
             </a:r>
           </a:p>
         </p:txBody>
@@ -4204,7 +4204,7 @@
                 <a:ea typeface="メイリオ"/>
                 <a:cs typeface="メイリオ"/>
               </a:rPr>
-              <a:t>銀座店 30万円 → 20万円</a:t>
+              <a:t>同じ方に何度も出ている重複表示の分</a:t>
             </a:r>
           </a:p>
         </p:txBody>
@@ -4292,7 +4292,7 @@
                 <a:ea typeface="メイリオ"/>
                 <a:cs typeface="メイリオ"/>
               </a:rPr>
-              <a:t>予算の流れ</a:t>
+              <a:t>銀座店の例（月）</a:t>
             </a:r>
           </a:p>
         </p:txBody>
@@ -4377,7 +4377,7 @@
                 <a:ea typeface="メイリオ"/>
                 <a:cs typeface="メイリオ"/>
               </a:rPr>
-              <a:t>（各エリアの予算）</a:t>
+              <a:t>30万円</a:t>
             </a:r>
           </a:p>
         </p:txBody>
@@ -4477,7 +4477,7 @@
                 <a:ea typeface="メイリオ"/>
                 <a:cs typeface="メイリオ"/>
               </a:rPr>
-              <a:t>見直しで浮いた予算</a:t>
+              <a:t>Meta広告 20万円</a:t>
             </a:r>
           </a:p>
           <a:p>
@@ -4498,7 +4498,7 @@
                 <a:ea typeface="メイリオ"/>
                 <a:cs typeface="メイリオ"/>
               </a:rPr>
-              <a:t>（全体で10〜30万円）</a:t>
+              <a:t>（重複表示の分を削る）</a:t>
             </a:r>
           </a:p>
         </p:txBody>
@@ -4598,7 +4598,7 @@
                 <a:ea typeface="メイリオ"/>
                 <a:cs typeface="メイリオ"/>
               </a:rPr>
-              <a:t>LINE広告（通常）</a:t>
+              <a:t>LINE広告 10万円</a:t>
             </a:r>
           </a:p>
           <a:p>
@@ -4619,7 +4619,7 @@
                 <a:ea typeface="メイリオ"/>
                 <a:cs typeface="メイリオ"/>
               </a:rPr>
-              <a:t>20万円</a:t>
+              <a:t>（浮いた分を振り替え）</a:t>
             </a:r>
           </a:p>
         </p:txBody>
@@ -4751,7 +4751,7 @@
                 <a:ea typeface="メイリオ"/>
                 <a:cs typeface="メイリオ"/>
               </a:rPr>
-              <a:t>広告費の総額</a:t>
+              <a:t>広告費</a:t>
             </a:r>
           </a:p>
         </p:txBody>
@@ -4795,95 +4795,7 @@
                 <a:ea typeface="メイリオ"/>
                 <a:cs typeface="メイリオ"/>
               </a:rPr>
-              <a:t>変わらない（今のMeta広告の予算の中で振り替える）</a:t>
-            </a:r>
-          </a:p>
-        </p:txBody>
-      </p:sp>
-      <p:sp>
-        <p:nvSpPr>
-          <p:cNvPr id="23" name="TextBox 22"/>
-          <p:cNvSpPr txBox="1"/>
-          <p:nvPr/>
-        </p:nvSpPr>
-        <p:spPr>
-          <a:xfrm>
-            <a:off x="770400" y="4233599"/>
-            <a:ext cx="1655999" cy="259200"/>
-          </a:xfrm>
-          <a:prstGeom prst="rect">
-            <a:avLst/>
-          </a:prstGeom>
-          <a:noFill/>
-        </p:spPr>
-        <p:txBody>
-          <a:bodyPr wrap="square" anchor="t" lIns="36000" rIns="36000" tIns="10800" bIns="10800">
-            <a:spAutoFit/>
-          </a:bodyPr>
-          <a:lstStyle/>
-          <a:p>
-            <a:pPr algn="l">
-              <a:lnSpc>
-                <a:spcPct val="105000"/>
-              </a:lnSpc>
-              <a:spcAft>
-                <a:spcPts val="200"/>
-              </a:spcAft>
-            </a:pPr>
-            <a:r>
-              <a:rPr sz="1300" b="1">
-                <a:solidFill>
-                  <a:srgbClr val="333333"/>
-                </a:solidFill>
-                <a:latin typeface="メイリオ"/>
-                <a:ea typeface="メイリオ"/>
-                <a:cs typeface="メイリオ"/>
-              </a:rPr>
-              <a:t>LINE広告</a:t>
-            </a:r>
-          </a:p>
-        </p:txBody>
-      </p:sp>
-      <p:sp>
-        <p:nvSpPr>
-          <p:cNvPr id="24" name="TextBox 23"/>
-          <p:cNvSpPr txBox="1"/>
-          <p:nvPr/>
-        </p:nvSpPr>
-        <p:spPr>
-          <a:xfrm>
-            <a:off x="2426400" y="4233599"/>
-            <a:ext cx="6847199" cy="259200"/>
-          </a:xfrm>
-          <a:prstGeom prst="rect">
-            <a:avLst/>
-          </a:prstGeom>
-          <a:noFill/>
-        </p:spPr>
-        <p:txBody>
-          <a:bodyPr wrap="square" anchor="t" lIns="36000" rIns="36000" tIns="10800" bIns="10800">
-            <a:spAutoFit/>
-          </a:bodyPr>
-          <a:lstStyle/>
-          <a:p>
-            <a:pPr algn="l">
-              <a:lnSpc>
-                <a:spcPct val="105000"/>
-              </a:lnSpc>
-              <a:spcAft>
-                <a:spcPts val="200"/>
-              </a:spcAft>
-            </a:pPr>
-            <a:r>
-              <a:rPr sz="1300" b="0">
-                <a:solidFill>
-                  <a:srgbClr val="333333"/>
-                </a:solidFill>
-                <a:latin typeface="メイリオ"/>
-                <a:ea typeface="メイリオ"/>
-                <a:cs typeface="メイリオ"/>
-              </a:rPr>
-              <a:t>20万円は全店舗の合計</a:t>
+              <a:t>店舗ごとの総額は変わらない（銀座店は30万円のまま）</a:t>
             </a:r>
           </a:p>
         </p:txBody>
@@ -5469,7 +5381,7 @@
                 <a:ea typeface="メイリオ"/>
                 <a:cs typeface="メイリオ"/>
               </a:rPr>
-              <a:t>仮の数値（月）</a:t>
+              <a:t>仮の数値（銀座店・月）</a:t>
             </a:r>
           </a:p>
         </p:txBody>
@@ -5533,7 +5445,7 @@
                 <a:ea typeface="メイリオ"/>
                 <a:cs typeface="メイリオ"/>
               </a:rPr>
-              <a:t>予算</a:t>
+              <a:t>LINE広告</a:t>
             </a:r>
           </a:p>
           <a:p>
@@ -5554,7 +5466,7 @@
                 <a:ea typeface="メイリオ"/>
                 <a:cs typeface="メイリオ"/>
               </a:rPr>
-              <a:t>20万円</a:t>
+              <a:t>10万円</a:t>
             </a:r>
           </a:p>
         </p:txBody>
@@ -5654,7 +5566,7 @@
                 <a:ea typeface="メイリオ"/>
                 <a:cs typeface="メイリオ"/>
               </a:rPr>
-              <a:t>クリック 2,000</a:t>
+              <a:t>クリック 1,000</a:t>
             </a:r>
           </a:p>
           <a:p>
@@ -5775,7 +5687,7 @@
                 <a:ea typeface="メイリオ"/>
                 <a:cs typeface="メイリオ"/>
               </a:rPr>
-              <a:t>予約 20件</a:t>
+              <a:t>予約 10件</a:t>
             </a:r>
           </a:p>
           <a:p>
@@ -8255,7 +8167,7 @@
                 <a:ea typeface="メイリオ"/>
                 <a:cs typeface="メイリオ"/>
               </a:rPr>
-              <a:t>仮の数値（月）</a:t>
+              <a:t>仮の数値（銀座店・月）</a:t>
             </a:r>
           </a:p>
         </p:txBody>
@@ -8299,7 +8211,7 @@
                 <a:ea typeface="メイリオ"/>
                 <a:cs typeface="メイリオ"/>
               </a:rPr>
-              <a:t>予約</a:t>
+              <a:t>広告費</a:t>
             </a:r>
           </a:p>
         </p:txBody>
@@ -8343,7 +8255,7 @@
                 <a:ea typeface="メイリオ"/>
                 <a:cs typeface="メイリオ"/>
               </a:rPr>
-              <a:t>20件（LINE広告）</a:t>
+              <a:t>30万円のまま（Meta広告 20万円＋LINE広告 10万円）</a:t>
             </a:r>
           </a:p>
         </p:txBody>
@@ -8387,7 +8299,7 @@
                 <a:ea typeface="メイリオ"/>
                 <a:cs typeface="メイリオ"/>
               </a:rPr>
-              <a:t>費用</a:t>
+              <a:t>予約</a:t>
             </a:r>
           </a:p>
         </p:txBody>
@@ -8431,7 +8343,7 @@
                 <a:ea typeface="メイリオ"/>
                 <a:cs typeface="メイリオ"/>
               </a:rPr>
-              <a:t>23万円（LINE広告 20万円＋サンクスLINE 3万円）</a:t>
+              <a:t>10件（LINE広告から）</a:t>
             </a:r>
           </a:p>
         </p:txBody>
@@ -8475,7 +8387,7 @@
                 <a:ea typeface="メイリオ"/>
                 <a:cs typeface="メイリオ"/>
               </a:rPr>
-              <a:t>予約1件あたり</a:t>
+              <a:t>追加でかかる費用</a:t>
             </a:r>
           </a:p>
         </p:txBody>
@@ -8519,7 +8431,7 @@
                 <a:ea typeface="メイリオ"/>
                 <a:cs typeface="メイリオ"/>
               </a:rPr>
-              <a:t>11,500円（現状：15,000円以上）</a:t>
+              <a:t>サンクスLINE 月額3万円〜（初期15万円）</a:t>
             </a:r>
           </a:p>
         </p:txBody>
